--- a/Modele_Operationnel_LZI.pptx
+++ b/Modele_Operationnel_LZI.pptx
@@ -16,8 +16,8 @@
     <p:sldId id="286" r:id="rId10"/>
     <p:sldId id="261" r:id="rId11"/>
     <p:sldId id="262" r:id="rId12"/>
-    <p:sldId id="277" r:id="rId13"/>
-    <p:sldId id="281" r:id="rId14"/>
+    <p:sldId id="290" r:id="rId13"/>
+    <p:sldId id="277" r:id="rId14"/>
     <p:sldId id="274" r:id="rId15"/>
     <p:sldId id="279" r:id="rId16"/>
     <p:sldId id="264" r:id="rId17"/>
@@ -131,6 +131,7 @@
 <file path=ppt/revisionInfo.xml><?xml version="1.0" encoding="utf-8"?>
 <p1510:revInfo xmlns:a="http://schemas.openxmlformats.org/drawingml/2006/main" xmlns:r="http://schemas.openxmlformats.org/officeDocument/2006/relationships" xmlns:p1510="http://schemas.microsoft.com/office/powerpoint/2015/10/main">
   <p1510:revLst>
+    <p1510:client id="{41805062-8E8F-4DF9-A3AE-BD871EC06420}" v="5" dt="2026-07-01T21:17:16.942"/>
     <p1510:client id="{6F78310C-2617-4EA6-AC0F-6514E54BC405}" v="1103" dt="2026-07-01T20:22:34.936"/>
     <p1510:client id="{8117EFE2-292E-5343-B8B5-EB3AE26F0677}" v="5" dt="2026-07-01T09:40:54.694"/>
   </p1510:revLst>
@@ -166,7 +167,7 @@
   <pc:docChgLst>
     <pc:chgData name="Laurent LECOUTRE" userId="e53171f8a862639b" providerId="LiveId" clId="{6E215B28-5145-4087-8863-D167F731E897}"/>
     <pc:docChg chg="undo custSel addSld delSld modSld sldOrd">
-      <pc:chgData name="Laurent LECOUTRE" userId="e53171f8a862639b" providerId="LiveId" clId="{6E215B28-5145-4087-8863-D167F731E897}" dt="2026-07-01T20:22:34.936" v="4410" actId="20577"/>
+      <pc:chgData name="Laurent LECOUTRE" userId="e53171f8a862639b" providerId="LiveId" clId="{6E215B28-5145-4087-8863-D167F731E897}" dt="2026-07-01T21:35:08.390" v="4703"/>
       <pc:docMkLst>
         <pc:docMk/>
       </pc:docMkLst>
@@ -1137,7 +1138,7 @@
         </pc:graphicFrameChg>
       </pc:sldChg>
       <pc:sldChg chg="modSp add mod ord">
-        <pc:chgData name="Laurent LECOUTRE" userId="e53171f8a862639b" providerId="LiveId" clId="{6E215B28-5145-4087-8863-D167F731E897}" dt="2026-07-01T20:20:11.506" v="4310"/>
+        <pc:chgData name="Laurent LECOUTRE" userId="e53171f8a862639b" providerId="LiveId" clId="{6E215B28-5145-4087-8863-D167F731E897}" dt="2026-07-01T21:14:32.424" v="4422" actId="20577"/>
         <pc:sldMkLst>
           <pc:docMk/>
           <pc:sldMk cId="1131665150" sldId="274"/>
@@ -1167,7 +1168,7 @@
           </ac:spMkLst>
         </pc:spChg>
         <pc:graphicFrameChg chg="modGraphic">
-          <ac:chgData name="Laurent LECOUTRE" userId="e53171f8a862639b" providerId="LiveId" clId="{6E215B28-5145-4087-8863-D167F731E897}" dt="2026-07-01T18:14:55.267" v="2352"/>
+          <ac:chgData name="Laurent LECOUTRE" userId="e53171f8a862639b" providerId="LiveId" clId="{6E215B28-5145-4087-8863-D167F731E897}" dt="2026-07-01T21:14:32.424" v="4422" actId="20577"/>
           <ac:graphicFrameMkLst>
             <pc:docMk/>
             <pc:sldMk cId="1131665150" sldId="274"/>
@@ -1568,8 +1569,8 @@
           </ac:spMkLst>
         </pc:spChg>
       </pc:sldChg>
-      <pc:sldChg chg="delSp modSp add mod ord">
-        <pc:chgData name="Laurent LECOUTRE" userId="e53171f8a862639b" providerId="LiveId" clId="{6E215B28-5145-4087-8863-D167F731E897}" dt="2026-07-01T20:16:05.091" v="4285"/>
+      <pc:sldChg chg="delSp modSp add del mod ord">
+        <pc:chgData name="Laurent LECOUTRE" userId="e53171f8a862639b" providerId="LiveId" clId="{6E215B28-5145-4087-8863-D167F731E897}" dt="2026-07-01T20:42:48.399" v="4411" actId="47"/>
         <pc:sldMkLst>
           <pc:docMk/>
           <pc:sldMk cId="1813039442" sldId="281"/>
@@ -1854,6 +1855,60 @@
         <pc:sldMkLst>
           <pc:docMk/>
           <pc:sldMk cId="3018565166" sldId="288"/>
+        </pc:sldMkLst>
+      </pc:sldChg>
+      <pc:sldChg chg="addSp modSp new del mod ord setBg">
+        <pc:chgData name="Laurent LECOUTRE" userId="e53171f8a862639b" providerId="LiveId" clId="{6E215B28-5145-4087-8863-D167F731E897}" dt="2026-07-01T21:24:37.971" v="4701"/>
+        <pc:sldMkLst>
+          <pc:docMk/>
+          <pc:sldMk cId="1347042938" sldId="289"/>
+        </pc:sldMkLst>
+        <pc:spChg chg="add mod">
+          <ac:chgData name="Laurent LECOUTRE" userId="e53171f8a862639b" providerId="LiveId" clId="{6E215B28-5145-4087-8863-D167F731E897}" dt="2026-07-01T21:14:53.571" v="4430"/>
+          <ac:spMkLst>
+            <pc:docMk/>
+            <pc:sldMk cId="1347042938" sldId="289"/>
+            <ac:spMk id="2" creationId="{C9F67004-9A52-426C-AF90-4EA6D15420C6}"/>
+          </ac:spMkLst>
+        </pc:spChg>
+        <pc:spChg chg="add mod">
+          <ac:chgData name="Laurent LECOUTRE" userId="e53171f8a862639b" providerId="LiveId" clId="{6E215B28-5145-4087-8863-D167F731E897}" dt="2026-07-01T21:14:53.575" v="4436"/>
+          <ac:spMkLst>
+            <pc:docMk/>
+            <pc:sldMk cId="1347042938" sldId="289"/>
+            <ac:spMk id="3" creationId="{A25B86E4-4B2F-47C9-9063-58B2CA8BBB9B}"/>
+          </ac:spMkLst>
+        </pc:spChg>
+        <pc:spChg chg="add mod">
+          <ac:chgData name="Laurent LECOUTRE" userId="e53171f8a862639b" providerId="LiveId" clId="{6E215B28-5145-4087-8863-D167F731E897}" dt="2026-07-01T21:24:30.559" v="4694"/>
+          <ac:spMkLst>
+            <pc:docMk/>
+            <pc:sldMk cId="1347042938" sldId="289"/>
+            <ac:spMk id="6" creationId="{1CCAC0A6-D5B4-4E7C-88A6-0A6F9F327BE5}"/>
+          </ac:spMkLst>
+        </pc:spChg>
+        <pc:spChg chg="add mod">
+          <ac:chgData name="Laurent LECOUTRE" userId="e53171f8a862639b" providerId="LiveId" clId="{6E215B28-5145-4087-8863-D167F731E897}" dt="2026-07-01T21:24:30.561" v="4699"/>
+          <ac:spMkLst>
+            <pc:docMk/>
+            <pc:sldMk cId="1347042938" sldId="289"/>
+            <ac:spMk id="7" creationId="{622CDC85-544A-4C27-B47A-818B1FF380A5}"/>
+          </ac:spMkLst>
+        </pc:spChg>
+        <pc:graphicFrameChg chg="add modGraphic">
+          <ac:chgData name="Laurent LECOUTRE" userId="e53171f8a862639b" providerId="LiveId" clId="{6E215B28-5145-4087-8863-D167F731E897}" dt="2026-07-01T21:21:01.996" v="4691" actId="20577"/>
+          <ac:graphicFrameMkLst>
+            <pc:docMk/>
+            <pc:sldMk cId="1347042938" sldId="289"/>
+            <ac:graphicFrameMk id="5" creationId="{247B4177-B2DB-40D5-985B-19DBC7553199}"/>
+          </ac:graphicFrameMkLst>
+        </pc:graphicFrameChg>
+      </pc:sldChg>
+      <pc:sldChg chg="add ord">
+        <pc:chgData name="Laurent LECOUTRE" userId="e53171f8a862639b" providerId="LiveId" clId="{6E215B28-5145-4087-8863-D167F731E897}" dt="2026-07-01T21:35:08.390" v="4703"/>
+        <pc:sldMkLst>
+          <pc:docMk/>
+          <pc:sldMk cId="999650551" sldId="290"/>
         </pc:sldMkLst>
       </pc:sldChg>
     </pc:docChg>
@@ -4193,10 +4248,181 @@
       </p:grpSpPr>
       <p:sp>
         <p:nvSpPr>
-          <p:cNvPr id="12" name="Rectangle : coins arrondis 11">
+          <p:cNvPr id="2" name="ZoneTexte 1">
             <a:extLst>
               <a:ext uri="{FF2B5EF4-FFF2-40B4-BE49-F238E27FC236}">
-                <a16:creationId xmlns:a16="http://schemas.microsoft.com/office/drawing/2014/main" id="{D3E7CF61-3D03-4E67-8D92-A7677C8F0C67}"/>
+                <a16:creationId xmlns:a16="http://schemas.microsoft.com/office/drawing/2014/main" id="{6BD2141C-E89E-4123-BC3D-E519C8B825CC}"/>
+              </a:ext>
+            </a:extLst>
+          </p:cNvPr>
+          <p:cNvSpPr txBox="1"/>
+          <p:nvPr/>
+        </p:nvSpPr>
+        <p:spPr>
+          <a:xfrm>
+            <a:off x="546100" y="368300"/>
+            <a:ext cx="10972800" cy="553998"/>
+          </a:xfrm>
+          <a:prstGeom prst="rect">
+            <a:avLst/>
+          </a:prstGeom>
+          <a:noFill/>
+        </p:spPr>
+        <p:txBody>
+          <a:bodyPr vertOverflow="overflow" vert="horz" wrap="square" rtlCol="0" anchor="t">
+            <a:spAutoFit/>
+          </a:bodyPr>
+          <a:lstStyle/>
+          <a:p>
+            <a:pPr algn="l"/>
+            <a:r>
+              <a:rPr lang="fr-FR" sz="3000" b="1" dirty="0">
+                <a:solidFill>
+                  <a:srgbClr val="1E2761"/>
+                </a:solidFill>
+                <a:latin typeface="Cambria"/>
+                <a:ea typeface="Cambria"/>
+              </a:rPr>
+              <a:t>Gouvernance capacitaire &amp; agile</a:t>
+            </a:r>
+          </a:p>
+        </p:txBody>
+      </p:sp>
+      <p:sp>
+        <p:nvSpPr>
+          <p:cNvPr id="3" name="ZoneTexte 2">
+            <a:extLst>
+              <a:ext uri="{FF2B5EF4-FFF2-40B4-BE49-F238E27FC236}">
+                <a16:creationId xmlns:a16="http://schemas.microsoft.com/office/drawing/2014/main" id="{D21A1403-30EB-40F7-8EE8-E9D73BAF5717}"/>
+              </a:ext>
+            </a:extLst>
+          </p:cNvPr>
+          <p:cNvSpPr txBox="1"/>
+          <p:nvPr/>
+        </p:nvSpPr>
+        <p:spPr>
+          <a:xfrm>
+            <a:off x="546100" y="1346200"/>
+            <a:ext cx="10972800" cy="363220"/>
+          </a:xfrm>
+          <a:prstGeom prst="rect">
+            <a:avLst/>
+          </a:prstGeom>
+          <a:noFill/>
+        </p:spPr>
+        <p:txBody>
+          <a:bodyPr vertOverflow="overflow" vert="horz" wrap="square" rtlCol="0" anchor="t">
+            <a:spAutoFit/>
+          </a:bodyPr>
+          <a:lstStyle/>
+          <a:p>
+            <a:pPr algn="l"/>
+            <a:r>
+              <a:rPr lang="fr-FR" sz="1300">
+                <a:solidFill>
+                  <a:srgbClr val="44507A"/>
+                </a:solidFill>
+                <a:latin typeface="Calibri"/>
+                <a:ea typeface="Calibri"/>
+                <a:cs typeface="Calibri"/>
+              </a:rPr>
+              <a:t>Pilotage : Souha TIBI</a:t>
+            </a:r>
+          </a:p>
+        </p:txBody>
+      </p:sp>
+      <p:sp>
+        <p:nvSpPr>
+          <p:cNvPr id="4" name="ZoneTexte 3">
+            <a:extLst>
+              <a:ext uri="{FF2B5EF4-FFF2-40B4-BE49-F238E27FC236}">
+                <a16:creationId xmlns:a16="http://schemas.microsoft.com/office/drawing/2014/main" id="{18CA5B18-6FB9-4573-8A4C-F8755A83188F}"/>
+              </a:ext>
+            </a:extLst>
+          </p:cNvPr>
+          <p:cNvSpPr txBox="1"/>
+          <p:nvPr/>
+        </p:nvSpPr>
+        <p:spPr>
+          <a:xfrm>
+            <a:off x="546100" y="1701800"/>
+            <a:ext cx="10972800" cy="447040"/>
+          </a:xfrm>
+          <a:prstGeom prst="rect">
+            <a:avLst/>
+          </a:prstGeom>
+          <a:noFill/>
+        </p:spPr>
+        <p:txBody>
+          <a:bodyPr vertOverflow="overflow" vert="horz" wrap="square" rtlCol="0" anchor="t">
+            <a:spAutoFit/>
+          </a:bodyPr>
+          <a:lstStyle/>
+          <a:p>
+            <a:pPr algn="l"/>
+            <a:r>
+              <a:rPr lang="fr-FR" sz="1600" b="1" dirty="0">
+                <a:solidFill>
+                  <a:srgbClr val="1E2761"/>
+                </a:solidFill>
+                <a:latin typeface="Calibri"/>
+                <a:ea typeface="Calibri"/>
+                <a:cs typeface="Calibri"/>
+              </a:rPr>
+              <a:t>Instances de pilotage</a:t>
+            </a:r>
+          </a:p>
+        </p:txBody>
+      </p:sp>
+      <p:sp>
+        <p:nvSpPr>
+          <p:cNvPr id="5" name="ZoneTexte 4">
+            <a:extLst>
+              <a:ext uri="{FF2B5EF4-FFF2-40B4-BE49-F238E27FC236}">
+                <a16:creationId xmlns:a16="http://schemas.microsoft.com/office/drawing/2014/main" id="{732AE13D-52C5-4538-88B5-626C9A2E54F8}"/>
+              </a:ext>
+            </a:extLst>
+          </p:cNvPr>
+          <p:cNvSpPr txBox="1"/>
+          <p:nvPr/>
+        </p:nvSpPr>
+        <p:spPr>
+          <a:xfrm>
+            <a:off x="546100" y="5410200"/>
+            <a:ext cx="10972800" cy="447040"/>
+          </a:xfrm>
+          <a:prstGeom prst="rect">
+            <a:avLst/>
+          </a:prstGeom>
+          <a:noFill/>
+        </p:spPr>
+        <p:txBody>
+          <a:bodyPr vertOverflow="overflow" vert="horz" wrap="square" rtlCol="0" anchor="t">
+            <a:spAutoFit/>
+          </a:bodyPr>
+          <a:lstStyle/>
+          <a:p>
+            <a:pPr algn="l"/>
+            <a:r>
+              <a:rPr lang="fr-FR" sz="1600" b="1">
+                <a:solidFill>
+                  <a:srgbClr val="1E2761"/>
+                </a:solidFill>
+                <a:latin typeface="Calibri"/>
+                <a:ea typeface="Calibri"/>
+                <a:cs typeface="Calibri"/>
+              </a:rPr>
+              <a:t>Mode de fonctionnement</a:t>
+            </a:r>
+          </a:p>
+        </p:txBody>
+      </p:sp>
+      <p:sp>
+        <p:nvSpPr>
+          <p:cNvPr id="6" name="Rectangle : coins arrondis 5">
+            <a:extLst>
+              <a:ext uri="{FF2B5EF4-FFF2-40B4-BE49-F238E27FC236}">
+                <a16:creationId xmlns:a16="http://schemas.microsoft.com/office/drawing/2014/main" id="{F28EAA2A-70D1-4F95-9F6F-628C01483D9D}"/>
               </a:ext>
             </a:extLst>
           </p:cNvPr>
@@ -4205,14 +4431,14 @@
         </p:nvSpPr>
         <p:spPr>
           <a:xfrm>
-            <a:off x="546100" y="3810000"/>
-            <a:ext cx="11074400" cy="2311400"/>
+            <a:off x="546100" y="2209800"/>
+            <a:ext cx="3479800" cy="3073400"/>
           </a:xfrm>
           <a:prstGeom prst="roundRect">
             <a:avLst/>
           </a:prstGeom>
           <a:solidFill>
-            <a:srgbClr val="EAECF4"/>
+            <a:srgbClr val="1E2761"/>
           </a:solidFill>
           <a:ln w="12700" cap="flat" cmpd="sng" algn="ctr">
             <a:noFill/>
@@ -4237,105 +4463,192 @@
           </a:fontRef>
         </p:style>
         <p:txBody>
-          <a:bodyPr vertOverflow="clip" horzOverflow="clip" rtlCol="0" anchor="t"/>
-          <a:lstStyle/>
-          <a:p>
-            <a:pPr algn="l"/>
-            <a:endParaRPr lang="fr-FR"/>
-          </a:p>
-        </p:txBody>
-      </p:sp>
-      <p:sp>
-        <p:nvSpPr>
-          <p:cNvPr id="2" name="ZoneTexte 1">
+          <a:bodyPr vertOverflow="clip" horzOverflow="clip" wrap="square" rtlCol="0" anchor="t" anchorCtr="0">
+            <a:noAutofit/>
+          </a:bodyPr>
+          <a:lstStyle/>
+          <a:p>
+            <a:pPr marL="0" indent="0" algn="l">
+              <a:spcAft>
+                <a:spcPts val="100"/>
+              </a:spcAft>
+              <a:buNone/>
+            </a:pPr>
+            <a:r>
+              <a:rPr lang="fr-FR" sz="1800" b="1" dirty="0">
+                <a:solidFill>
+                  <a:srgbClr val="FFFFFF"/>
+                </a:solidFill>
+                <a:latin typeface="Calibri"/>
+              </a:rPr>
+              <a:t>COTECH</a:t>
+            </a:r>
+          </a:p>
+          <a:p>
+            <a:pPr marL="0" indent="0" algn="l">
+              <a:buNone/>
+            </a:pPr>
+            <a:r>
+              <a:rPr lang="fr-FR" sz="1400" i="1" dirty="0">
+                <a:solidFill>
+                  <a:schemeClr val="accent5">
+                    <a:lumMod val="60000"/>
+                    <a:lumOff val="40000"/>
+                  </a:schemeClr>
+                </a:solidFill>
+                <a:latin typeface="Calibri"/>
+              </a:rPr>
+              <a:t>Toutes les 2 semaines</a:t>
+            </a:r>
+          </a:p>
+          <a:p>
+            <a:pPr marL="0" indent="0" algn="l">
+              <a:spcBef>
+                <a:spcPts val="300"/>
+              </a:spcBef>
+              <a:buNone/>
+            </a:pPr>
+            <a:r>
+              <a:rPr lang="fr-FR" sz="1400" dirty="0">
+                <a:solidFill>
+                  <a:srgbClr val="DDE0EE"/>
+                </a:solidFill>
+                <a:latin typeface="Calibri"/>
+              </a:rPr>
+              <a:t>Suivi du build &amp; run, arbitrages techniques, revue des risques, des priorisations </a:t>
+            </a:r>
+            <a:r>
+              <a:rPr lang="fr-FR" sz="1400" dirty="0" err="1">
+                <a:solidFill>
+                  <a:srgbClr val="DDE0EE"/>
+                </a:solidFill>
+                <a:latin typeface="Calibri"/>
+              </a:rPr>
+              <a:t>build</a:t>
+            </a:r>
+            <a:r>
+              <a:rPr lang="fr-FR" sz="1400" dirty="0">
+                <a:solidFill>
+                  <a:srgbClr val="DDE0EE"/>
+                </a:solidFill>
+                <a:latin typeface="Calibri"/>
+              </a:rPr>
+              <a:t> &amp; run.</a:t>
+            </a:r>
+          </a:p>
+          <a:p>
+            <a:pPr marL="0" indent="0" algn="l">
+              <a:spcBef>
+                <a:spcPts val="300"/>
+              </a:spcBef>
+              <a:buNone/>
+            </a:pPr>
+            <a:br>
+              <a:rPr lang="fr-FR" sz="1400" dirty="0">
+                <a:solidFill>
+                  <a:srgbClr val="DDE0EE"/>
+                </a:solidFill>
+                <a:latin typeface="Calibri"/>
+              </a:rPr>
+            </a:br>
+            <a:endParaRPr lang="fr-FR" sz="1400" dirty="0">
+              <a:solidFill>
+                <a:srgbClr val="DDE0EE"/>
+              </a:solidFill>
+              <a:latin typeface="Calibri"/>
+            </a:endParaRPr>
+          </a:p>
+          <a:p>
+            <a:pPr>
+              <a:spcBef>
+                <a:spcPts val="300"/>
+              </a:spcBef>
+              <a:spcAft>
+                <a:spcPts val="100"/>
+              </a:spcAft>
+            </a:pPr>
+            <a:r>
+              <a:rPr lang="fr-FR" b="1" dirty="0">
+                <a:solidFill>
+                  <a:srgbClr val="FFFFFF"/>
+                </a:solidFill>
+                <a:latin typeface="Calibri"/>
+              </a:rPr>
+              <a:t>Participants</a:t>
+            </a:r>
+          </a:p>
+          <a:p>
+            <a:pPr marL="0" indent="0" algn="l">
+              <a:buNone/>
+            </a:pPr>
+            <a:r>
+              <a:rPr lang="fr-FR" sz="1400" b="1" dirty="0">
+                <a:solidFill>
+                  <a:srgbClr val="FFFFFF"/>
+                </a:solidFill>
+                <a:latin typeface="Calibri"/>
+              </a:rPr>
+              <a:t>CAGIP</a:t>
+            </a:r>
+            <a:r>
+              <a:rPr lang="fr-FR" sz="1400" dirty="0">
+                <a:solidFill>
+                  <a:srgbClr val="DDE0EE"/>
+                </a:solidFill>
+                <a:latin typeface="Calibri"/>
+              </a:rPr>
+              <a:t> : Lead </a:t>
+            </a:r>
+            <a:r>
+              <a:rPr lang="fr-FR" sz="1400" dirty="0" err="1">
+                <a:solidFill>
+                  <a:srgbClr val="DDE0EE"/>
+                </a:solidFill>
+                <a:latin typeface="Calibri"/>
+              </a:rPr>
+              <a:t>squad</a:t>
+            </a:r>
+            <a:r>
+              <a:rPr lang="fr-FR" sz="1400" dirty="0">
+                <a:solidFill>
+                  <a:srgbClr val="DDE0EE"/>
+                </a:solidFill>
+                <a:latin typeface="Calibri"/>
+              </a:rPr>
+              <a:t> (animation)</a:t>
+            </a:r>
+          </a:p>
+          <a:p>
+            <a:pPr marL="0" indent="0" algn="l">
+              <a:buNone/>
+            </a:pPr>
+            <a:r>
+              <a:rPr lang="fr-FR" sz="1400" b="1" dirty="0">
+                <a:solidFill>
+                  <a:srgbClr val="FFFFFF"/>
+                </a:solidFill>
+                <a:latin typeface="Calibri"/>
+              </a:rPr>
+              <a:t>CAPFM Corp</a:t>
+            </a:r>
+            <a:r>
+              <a:rPr lang="fr-FR" sz="1400" dirty="0">
+                <a:solidFill>
+                  <a:srgbClr val="DDE0EE"/>
+                </a:solidFill>
+                <a:latin typeface="Calibri"/>
+              </a:rPr>
+              <a:t> : Correspondant(s) opérationnel(s)</a:t>
+            </a:r>
+          </a:p>
+        </p:txBody>
+      </p:sp>
+      <p:sp>
+        <p:nvSpPr>
+          <p:cNvPr id="7" name="Rectangle : coins arrondis 6">
             <a:extLst>
               <a:ext uri="{FF2B5EF4-FFF2-40B4-BE49-F238E27FC236}">
-                <a16:creationId xmlns:a16="http://schemas.microsoft.com/office/drawing/2014/main" id="{DAE2D864-87F8-4F8B-B674-AE27794107E6}"/>
-              </a:ext>
-            </a:extLst>
-          </p:cNvPr>
-          <p:cNvSpPr txBox="1"/>
-          <p:nvPr/>
-        </p:nvSpPr>
-        <p:spPr>
-          <a:xfrm>
-            <a:off x="546100" y="368300"/>
-            <a:ext cx="10972800" cy="660400"/>
-          </a:xfrm>
-          <a:prstGeom prst="rect">
-            <a:avLst/>
-          </a:prstGeom>
-          <a:noFill/>
-        </p:spPr>
-        <p:txBody>
-          <a:bodyPr vertOverflow="overflow" vert="horz" wrap="square" rtlCol="0" anchor="t">
-            <a:spAutoFit/>
-          </a:bodyPr>
-          <a:lstStyle/>
-          <a:p>
-            <a:pPr algn="l"/>
-            <a:r>
-              <a:rPr lang="fr-FR" sz="2800" b="1">
-                <a:solidFill>
-                  <a:srgbClr val="1E2761"/>
-                </a:solidFill>
-                <a:latin typeface="Cambria"/>
-                <a:ea typeface="Cambria"/>
-              </a:rPr>
-              <a:t>Mise en place progressive &amp; amélioration continue</a:t>
-            </a:r>
-          </a:p>
-        </p:txBody>
-      </p:sp>
-      <p:sp>
-        <p:nvSpPr>
-          <p:cNvPr id="3" name="ZoneTexte 2">
-            <a:extLst>
-              <a:ext uri="{FF2B5EF4-FFF2-40B4-BE49-F238E27FC236}">
-                <a16:creationId xmlns:a16="http://schemas.microsoft.com/office/drawing/2014/main" id="{9D014E3A-2726-4E02-98FC-40C5EB227896}"/>
-              </a:ext>
-            </a:extLst>
-          </p:cNvPr>
-          <p:cNvSpPr txBox="1"/>
-          <p:nvPr/>
-        </p:nvSpPr>
-        <p:spPr>
-          <a:xfrm>
-            <a:off x="546100" y="1117600"/>
-            <a:ext cx="10972800" cy="355600"/>
-          </a:xfrm>
-          <a:prstGeom prst="rect">
-            <a:avLst/>
-          </a:prstGeom>
-          <a:noFill/>
-        </p:spPr>
-        <p:txBody>
-          <a:bodyPr vertOverflow="overflow" vert="horz" wrap="square" rtlCol="0" anchor="t">
-            <a:spAutoFit/>
-          </a:bodyPr>
-          <a:lstStyle/>
-          <a:p>
-            <a:pPr algn="l"/>
-            <a:r>
-              <a:rPr lang="fr-FR" sz="1300">
-                <a:solidFill>
-                  <a:srgbClr val="44507A"/>
-                </a:solidFill>
-                <a:latin typeface="Calibri"/>
-                <a:ea typeface="Calibri"/>
-                <a:cs typeface="Calibri"/>
-              </a:rPr>
-              <a:t>Déploiement du dispositif par paliers de maturité, ajusté en continu via des boucles de feedback.</a:t>
-            </a:r>
-          </a:p>
-        </p:txBody>
-      </p:sp>
-      <p:sp>
-        <p:nvSpPr>
-          <p:cNvPr id="4" name="Rectangle : coins arrondis 3">
-            <a:extLst>
-              <a:ext uri="{FF2B5EF4-FFF2-40B4-BE49-F238E27FC236}">
-                <a16:creationId xmlns:a16="http://schemas.microsoft.com/office/drawing/2014/main" id="{6C4CACDE-BBC7-4375-ABE9-8F9943C58CCA}"/>
+                <a16:creationId xmlns:a16="http://schemas.microsoft.com/office/drawing/2014/main" id="{9836FBF5-3212-4A17-B663-9B97E3225B28}"/>
               </a:ext>
             </a:extLst>
           </p:cNvPr>
@@ -4344,8 +4657,8 @@
         </p:nvSpPr>
         <p:spPr>
           <a:xfrm>
-            <a:off x="546100" y="1905000"/>
-            <a:ext cx="3403600" cy="1625600"/>
+            <a:off x="4343400" y="2209800"/>
+            <a:ext cx="3479800" cy="3073400"/>
           </a:xfrm>
           <a:prstGeom prst="roundRect">
             <a:avLst/>
@@ -4383,62 +4696,158 @@
           <a:p>
             <a:pPr marL="0" indent="0" algn="l">
               <a:spcAft>
-                <a:spcPts val="400"/>
+                <a:spcPts val="100"/>
               </a:spcAft>
               <a:buNone/>
             </a:pPr>
             <a:r>
-              <a:rPr lang="fr-FR" sz="1400" b="1" dirty="0">
+              <a:rPr lang="fr-FR" sz="1800" b="1" dirty="0">
                 <a:solidFill>
                   <a:srgbClr val="FFFFFF"/>
                 </a:solidFill>
                 <a:latin typeface="Calibri"/>
               </a:rPr>
-              <a:t>Phase 1 — Fondations</a:t>
-            </a:r>
-            <a:br>
-              <a:rPr lang="fr-FR" sz="1400" b="1" dirty="0">
-                <a:solidFill>
-                  <a:srgbClr val="FFFFFF"/>
+              <a:t>COPIL</a:t>
+            </a:r>
+          </a:p>
+          <a:p>
+            <a:r>
+              <a:rPr lang="fr-FR" sz="1400" i="1" dirty="0">
+                <a:solidFill>
+                  <a:schemeClr val="accent5">
+                    <a:lumMod val="60000"/>
+                    <a:lumOff val="40000"/>
+                  </a:schemeClr>
                 </a:solidFill>
                 <a:latin typeface="Calibri"/>
               </a:rPr>
-            </a:br>
-            <a:r>
-              <a:rPr lang="fr-FR" sz="1400" b="1" dirty="0">
-                <a:solidFill>
-                  <a:srgbClr val="FFFFFF"/>
-                </a:solidFill>
-                <a:latin typeface="Calibri"/>
-              </a:rPr>
-              <a:t>Juillet/aout</a:t>
+              <a:t>Mensuel</a:t>
             </a:r>
           </a:p>
           <a:p>
             <a:pPr marL="0" indent="0" algn="l">
-              <a:lnSpc>
-                <a:spcPct val="115000"/>
-              </a:lnSpc>
+              <a:spcBef>
+                <a:spcPts val="300"/>
+              </a:spcBef>
               <a:buNone/>
             </a:pPr>
             <a:r>
-              <a:rPr lang="fr-FR" sz="1200" dirty="0">
+              <a:rPr lang="fr-FR" sz="1400" dirty="0">
+                <a:solidFill>
+                  <a:srgbClr val="DDE0EE"/>
+                </a:solidFill>
+                <a:latin typeface="Calibri"/>
+              </a:rPr>
+              <a:t>Pilotage budgétaire et des jalons, décisions d'engagement, revue des indicateurs.</a:t>
+            </a:r>
+          </a:p>
+          <a:p>
+            <a:pPr marL="0" indent="0" algn="l">
+              <a:spcBef>
+                <a:spcPts val="300"/>
+              </a:spcBef>
+              <a:buNone/>
+            </a:pPr>
+            <a:endParaRPr lang="fr-FR" sz="1400" dirty="0">
+              <a:solidFill>
+                <a:srgbClr val="DDE0EE"/>
+              </a:solidFill>
+              <a:latin typeface="Calibri"/>
+            </a:endParaRPr>
+          </a:p>
+          <a:p>
+            <a:pPr indent="0">
+              <a:spcBef>
+                <a:spcPts val="300"/>
+              </a:spcBef>
+              <a:spcAft>
+                <a:spcPts val="100"/>
+              </a:spcAft>
+              <a:buNone/>
+            </a:pPr>
+            <a:r>
+              <a:rPr lang="fr-FR" b="1" dirty="0">
                 <a:solidFill>
                   <a:srgbClr val="FFFFFF"/>
                 </a:solidFill>
                 <a:latin typeface="Calibri"/>
               </a:rPr>
-              <a:t>Mise en place de la Landing Zone et de l'équipe cœur (Lead + 2 Cloud Ops).</a:t>
-            </a:r>
-          </a:p>
-        </p:txBody>
-      </p:sp>
-      <p:sp>
-        <p:nvSpPr>
-          <p:cNvPr id="6" name="Rectangle : coins arrondis 5">
+              <a:t>Participants</a:t>
+            </a:r>
+          </a:p>
+          <a:p>
+            <a:r>
+              <a:rPr lang="fr-FR" sz="1400" b="1" dirty="0">
+                <a:solidFill>
+                  <a:srgbClr val="FFFFFF"/>
+                </a:solidFill>
+                <a:latin typeface="Calibri"/>
+              </a:rPr>
+              <a:t>CAGIP</a:t>
+            </a:r>
+            <a:r>
+              <a:rPr lang="fr-FR" sz="1400" dirty="0">
+                <a:solidFill>
+                  <a:srgbClr val="DDE0EE"/>
+                </a:solidFill>
+                <a:latin typeface="Calibri"/>
+              </a:rPr>
+              <a:t> : Lead SQUAD</a:t>
+            </a:r>
+            <a:r>
+              <a:rPr lang="fr-FR" sz="1400" dirty="0">
+                <a:solidFill>
+                  <a:srgbClr val="DDE0EE"/>
+                </a:solidFill>
+              </a:rPr>
+              <a:t> (animation)</a:t>
+            </a:r>
+          </a:p>
+          <a:p>
+            <a:pPr marL="0" indent="0" algn="l">
+              <a:buNone/>
+            </a:pPr>
+            <a:r>
+              <a:rPr lang="fr-FR" sz="1400" dirty="0">
+                <a:solidFill>
+                  <a:srgbClr val="DDE0EE"/>
+                </a:solidFill>
+                <a:latin typeface="Calibri"/>
+              </a:rPr>
+              <a:t>, Manager CAGIP et Lead DE (gestion des engagements)</a:t>
+            </a:r>
+          </a:p>
+          <a:p>
+            <a:pPr marL="0" indent="0" algn="l">
+              <a:buNone/>
+            </a:pPr>
+            <a:r>
+              <a:rPr lang="fr-FR" sz="1400" b="1" dirty="0">
+                <a:solidFill>
+                  <a:srgbClr val="FFFFFF"/>
+                </a:solidFill>
+                <a:latin typeface="Calibri"/>
+              </a:rPr>
+              <a:t>CAPFM Corp</a:t>
+            </a:r>
+            <a:r>
+              <a:rPr lang="fr-FR" sz="1400" dirty="0">
+                <a:solidFill>
+                  <a:srgbClr val="DDE0EE"/>
+                </a:solidFill>
+                <a:latin typeface="Calibri"/>
+              </a:rPr>
+              <a:t> : Correspondant(s) Pilotage &amp; stratégie</a:t>
+            </a:r>
+          </a:p>
+        </p:txBody>
+      </p:sp>
+      <p:sp>
+        <p:nvSpPr>
+          <p:cNvPr id="8" name="Rectangle : coins arrondis 7">
             <a:extLst>
               <a:ext uri="{FF2B5EF4-FFF2-40B4-BE49-F238E27FC236}">
-                <a16:creationId xmlns:a16="http://schemas.microsoft.com/office/drawing/2014/main" id="{633C4651-E2EE-4D44-A6A4-D14DC7FEFB9A}"/>
+                <a16:creationId xmlns:a16="http://schemas.microsoft.com/office/drawing/2014/main" id="{661373E9-1936-4B2D-949D-64F88F12D17B}"/>
               </a:ext>
             </a:extLst>
           </p:cNvPr>
@@ -4447,8 +4856,8 @@
         </p:nvSpPr>
         <p:spPr>
           <a:xfrm>
-            <a:off x="4381500" y="1905000"/>
-            <a:ext cx="3403600" cy="1625600"/>
+            <a:off x="8140700" y="2209800"/>
+            <a:ext cx="3479800" cy="3073400"/>
           </a:xfrm>
           <a:prstGeom prst="roundRect">
             <a:avLst/>
@@ -4486,76 +4895,118 @@
           <a:p>
             <a:pPr marL="0" indent="0" algn="l">
               <a:spcAft>
-                <a:spcPts val="400"/>
+                <a:spcPts val="100"/>
               </a:spcAft>
               <a:buNone/>
             </a:pPr>
             <a:r>
-              <a:rPr lang="fr-FR" sz="1400" b="1" dirty="0">
+              <a:rPr lang="fr-FR" sz="1800" b="1" dirty="0">
                 <a:solidFill>
                   <a:srgbClr val="FFFFFF"/>
                 </a:solidFill>
                 <a:latin typeface="Calibri"/>
               </a:rPr>
-              <a:t>Phase 2 — Industrialisation</a:t>
-            </a:r>
-            <a:br>
-              <a:rPr lang="fr-FR" sz="1400" b="1" dirty="0">
-                <a:solidFill>
-                  <a:srgbClr val="FFFFFF"/>
+              <a:t>Daily</a:t>
+            </a:r>
+          </a:p>
+          <a:p>
+            <a:pPr indent="0">
+              <a:buNone/>
+            </a:pPr>
+            <a:r>
+              <a:rPr lang="fr-FR" sz="1400" i="1" dirty="0">
+                <a:solidFill>
+                  <a:schemeClr val="accent5">
+                    <a:lumMod val="60000"/>
+                    <a:lumOff val="40000"/>
+                  </a:schemeClr>
                 </a:solidFill>
                 <a:latin typeface="Calibri"/>
               </a:rPr>
-            </a:br>
+              <a:t>Quotidien</a:t>
+            </a:r>
+          </a:p>
+          <a:p>
+            <a:pPr marL="0" indent="0" algn="l">
+              <a:spcBef>
+                <a:spcPts val="300"/>
+              </a:spcBef>
+              <a:buNone/>
+            </a:pPr>
+            <a:r>
+              <a:rPr lang="fr-FR" sz="1400" dirty="0">
+                <a:solidFill>
+                  <a:srgbClr val="DDE0EE"/>
+                </a:solidFill>
+                <a:latin typeface="Calibri"/>
+              </a:rPr>
+              <a:t>Point d'équipe interne court : avancement, blocages et coordination du jour.</a:t>
+            </a:r>
+          </a:p>
+          <a:p>
+            <a:pPr marL="0" indent="0" algn="l">
+              <a:spcBef>
+                <a:spcPts val="300"/>
+              </a:spcBef>
+              <a:buNone/>
+            </a:pPr>
             <a:endParaRPr lang="fr-FR" sz="1400" b="1" dirty="0">
               <a:solidFill>
-                <a:srgbClr val="FFFFFF"/>
+                <a:srgbClr val="C3C7E0"/>
               </a:solidFill>
               <a:latin typeface="Calibri"/>
             </a:endParaRPr>
           </a:p>
           <a:p>
+            <a:pPr>
+              <a:spcBef>
+                <a:spcPts val="300"/>
+              </a:spcBef>
+              <a:spcAft>
+                <a:spcPts val="100"/>
+              </a:spcAft>
+            </a:pPr>
+            <a:r>
+              <a:rPr lang="fr-FR" b="1" dirty="0">
+                <a:solidFill>
+                  <a:srgbClr val="FFFFFF"/>
+                </a:solidFill>
+                <a:latin typeface="Calibri"/>
+              </a:rPr>
+              <a:t>Participants</a:t>
+            </a:r>
+          </a:p>
+          <a:p>
             <a:pPr marL="0" indent="0" algn="l">
-              <a:lnSpc>
-                <a:spcPct val="115000"/>
-              </a:lnSpc>
               <a:buNone/>
             </a:pPr>
             <a:r>
-              <a:rPr lang="fr-FR" sz="1200" dirty="0">
+              <a:rPr lang="fr-FR" sz="1400" b="1" dirty="0">
                 <a:solidFill>
                   <a:srgbClr val="FFFFFF"/>
                 </a:solidFill>
                 <a:latin typeface="Calibri"/>
               </a:rPr>
-              <a:t>Montée en charge BUILD/RUN et renforcement progressif de l'équipe.</a:t>
-            </a:r>
-            <a:br>
-              <a:rPr lang="fr-FR" sz="1200" dirty="0">
-                <a:solidFill>
-                  <a:srgbClr val="FFFFFF"/>
+              <a:t>CAGIP</a:t>
+            </a:r>
+            <a:r>
+              <a:rPr lang="fr-FR" sz="1400" dirty="0">
+                <a:solidFill>
+                  <a:srgbClr val="DDE0EE"/>
                 </a:solidFill>
                 <a:latin typeface="Calibri"/>
               </a:rPr>
-            </a:br>
-            <a:r>
-              <a:rPr lang="fr-FR" sz="1200" dirty="0">
-                <a:solidFill>
-                  <a:srgbClr val="FFFFFF"/>
-                </a:solidFill>
-                <a:latin typeface="Calibri"/>
-              </a:rPr>
-              <a:t>Amélioration continue du Pilotage (KPI) &amp; gouvernance</a:t>
-            </a:r>
-          </a:p>
-        </p:txBody>
-      </p:sp>
-      <p:sp>
-        <p:nvSpPr>
-          <p:cNvPr id="8" name="Rectangle : coins arrondis 7">
+              <a:t> : Lead squad &amp; Cloud Ops</a:t>
+            </a:r>
+          </a:p>
+        </p:txBody>
+      </p:sp>
+      <p:sp>
+        <p:nvSpPr>
+          <p:cNvPr id="9" name="Rectangle : coins arrondis 8">
             <a:extLst>
               <a:ext uri="{FF2B5EF4-FFF2-40B4-BE49-F238E27FC236}">
-                <a16:creationId xmlns:a16="http://schemas.microsoft.com/office/drawing/2014/main" id="{F149BFE3-C17E-4B5E-A0BE-34D108184F56}"/>
+                <a16:creationId xmlns:a16="http://schemas.microsoft.com/office/drawing/2014/main" id="{5496B810-0254-4647-91CB-B195695B294C}"/>
               </a:ext>
             </a:extLst>
           </p:cNvPr>
@@ -4564,14 +5015,14 @@
         </p:nvSpPr>
         <p:spPr>
           <a:xfrm>
-            <a:off x="8216900" y="1905000"/>
-            <a:ext cx="3403600" cy="1625600"/>
+            <a:off x="546100" y="5715000"/>
+            <a:ext cx="11099800" cy="736600"/>
           </a:xfrm>
           <a:prstGeom prst="roundRect">
             <a:avLst/>
           </a:prstGeom>
           <a:solidFill>
-            <a:srgbClr val="1E2761"/>
+            <a:srgbClr val="EAECF4"/>
           </a:solidFill>
           <a:ln w="12700" cap="flat" cmpd="sng" algn="ctr">
             <a:noFill/>
@@ -4596,720 +5047,62 @@
           </a:fontRef>
         </p:style>
         <p:txBody>
-          <a:bodyPr vertOverflow="clip" horzOverflow="clip" wrap="square" rtlCol="0" anchor="t" anchorCtr="0">
+          <a:bodyPr vertOverflow="clip" horzOverflow="clip" wrap="square" rtlCol="0" anchor="ctr" anchorCtr="0">
             <a:noAutofit/>
           </a:bodyPr>
           <a:lstStyle/>
           <a:p>
-            <a:pPr marL="0" indent="0" algn="l">
+            <a:pPr marL="200025" indent="-200025">
               <a:spcAft>
                 <a:spcPts val="400"/>
               </a:spcAft>
-              <a:buNone/>
+              <a:buFont typeface="Arial"/>
+              <a:buChar char="•"/>
             </a:pPr>
             <a:r>
-              <a:rPr lang="fr-FR" sz="1400" b="1" dirty="0">
-                <a:solidFill>
-                  <a:srgbClr val="FFFFFF"/>
+              <a:rPr lang="fr-FR" sz="1500" dirty="0">
+                <a:solidFill>
+                  <a:srgbClr val="1E2761"/>
                 </a:solidFill>
                 <a:latin typeface="Calibri"/>
               </a:rPr>
-              <a:t>Phase 3 — Run à l'échelle</a:t>
-            </a:r>
-          </a:p>
-          <a:p>
-            <a:pPr marL="0" indent="0" algn="l">
-              <a:lnSpc>
-                <a:spcPct val="115000"/>
-              </a:lnSpc>
-              <a:buNone/>
+              <a:t>Enveloppe capacitaire globalisée build &amp; run.</a:t>
+            </a:r>
+          </a:p>
+          <a:p>
+            <a:pPr marL="200025" indent="-200025">
+              <a:spcAft>
+                <a:spcPts val="400"/>
+              </a:spcAft>
+              <a:buFont typeface="Arial"/>
+              <a:buChar char="•"/>
             </a:pPr>
             <a:r>
-              <a:rPr lang="fr-FR" sz="1200" dirty="0">
-                <a:solidFill>
-                  <a:srgbClr val="FFFFFF"/>
+              <a:rPr lang="fr-FR" sz="1500" dirty="0">
+                <a:solidFill>
+                  <a:srgbClr val="1E2761"/>
                 </a:solidFill>
                 <a:latin typeface="Calibri"/>
               </a:rPr>
-              <a:t>Dispositif industriel optimisé, astreinte 24/7 : cible de maturité atteinte.</a:t>
-            </a:r>
-          </a:p>
-        </p:txBody>
-      </p:sp>
-      <p:sp>
-        <p:nvSpPr>
-          <p:cNvPr id="10" name="Flèche : droite 9">
-            <a:extLst>
-              <a:ext uri="{FF2B5EF4-FFF2-40B4-BE49-F238E27FC236}">
-                <a16:creationId xmlns:a16="http://schemas.microsoft.com/office/drawing/2014/main" id="{0ABC6CEE-CD82-48DE-BD2F-E5483DF85CD3}"/>
-              </a:ext>
-            </a:extLst>
-          </p:cNvPr>
-          <p:cNvSpPr/>
-          <p:nvPr/>
-        </p:nvSpPr>
-        <p:spPr>
-          <a:xfrm>
-            <a:off x="3975100" y="2540000"/>
-            <a:ext cx="381000" cy="330200"/>
-          </a:xfrm>
-          <a:prstGeom prst="rightArrow">
-            <a:avLst/>
-          </a:prstGeom>
-          <a:solidFill>
-            <a:srgbClr val="1E2761"/>
-          </a:solidFill>
-          <a:ln w="12700" cap="flat" cmpd="sng" algn="ctr">
-            <a:noFill/>
-            <a:prstDash val="solid"/>
-            <a:miter lim="800000"/>
-          </a:ln>
-        </p:spPr>
-        <p:style>
-          <a:lnRef idx="2">
-            <a:schemeClr val="accent1">
-              <a:shade val="15000"/>
-            </a:schemeClr>
-          </a:lnRef>
-          <a:fillRef idx="1">
-            <a:schemeClr val="accent1"/>
-          </a:fillRef>
-          <a:effectRef idx="0">
-            <a:schemeClr val="accent1"/>
-          </a:effectRef>
-          <a:fontRef idx="minor">
-            <a:schemeClr val="lt1"/>
-          </a:fontRef>
-        </p:style>
-        <p:txBody>
-          <a:bodyPr vertOverflow="clip" horzOverflow="clip" rtlCol="0" anchor="t"/>
-          <a:lstStyle/>
-          <a:p>
-            <a:pPr algn="l"/>
-            <a:endParaRPr lang="fr-FR"/>
-          </a:p>
-        </p:txBody>
-      </p:sp>
-      <p:sp>
-        <p:nvSpPr>
-          <p:cNvPr id="11" name="Flèche : droite 10">
-            <a:extLst>
-              <a:ext uri="{FF2B5EF4-FFF2-40B4-BE49-F238E27FC236}">
-                <a16:creationId xmlns:a16="http://schemas.microsoft.com/office/drawing/2014/main" id="{B01C578C-FA02-43BC-8714-81671D573B36}"/>
-              </a:ext>
-            </a:extLst>
-          </p:cNvPr>
-          <p:cNvSpPr/>
-          <p:nvPr/>
-        </p:nvSpPr>
-        <p:spPr>
-          <a:xfrm>
-            <a:off x="7810500" y="2540000"/>
-            <a:ext cx="381000" cy="330200"/>
-          </a:xfrm>
-          <a:prstGeom prst="rightArrow">
-            <a:avLst/>
-          </a:prstGeom>
-          <a:solidFill>
-            <a:srgbClr val="1E2761"/>
-          </a:solidFill>
-          <a:ln w="12700" cap="flat" cmpd="sng" algn="ctr">
-            <a:noFill/>
-            <a:prstDash val="solid"/>
-            <a:miter lim="800000"/>
-          </a:ln>
-        </p:spPr>
-        <p:style>
-          <a:lnRef idx="2">
-            <a:schemeClr val="accent1">
-              <a:shade val="15000"/>
-            </a:schemeClr>
-          </a:lnRef>
-          <a:fillRef idx="1">
-            <a:schemeClr val="accent1"/>
-          </a:fillRef>
-          <a:effectRef idx="0">
-            <a:schemeClr val="accent1"/>
-          </a:effectRef>
-          <a:fontRef idx="minor">
-            <a:schemeClr val="lt1"/>
-          </a:fontRef>
-        </p:style>
-        <p:txBody>
-          <a:bodyPr vertOverflow="clip" horzOverflow="clip" rtlCol="0" anchor="t"/>
-          <a:lstStyle/>
-          <a:p>
-            <a:pPr algn="l"/>
-            <a:endParaRPr lang="fr-FR"/>
-          </a:p>
-        </p:txBody>
-      </p:sp>
-      <p:sp>
-        <p:nvSpPr>
-          <p:cNvPr id="13" name="Flèche : en arc 12">
-            <a:extLst>
-              <a:ext uri="{FF2B5EF4-FFF2-40B4-BE49-F238E27FC236}">
-                <a16:creationId xmlns:a16="http://schemas.microsoft.com/office/drawing/2014/main" id="{75B840F5-8923-4FB2-9994-C4AF1C6AE54C}"/>
-              </a:ext>
-            </a:extLst>
-          </p:cNvPr>
-          <p:cNvSpPr/>
-          <p:nvPr/>
-        </p:nvSpPr>
-        <p:spPr>
-          <a:xfrm>
-            <a:off x="4597400" y="3962400"/>
-            <a:ext cx="304800" cy="304800"/>
-          </a:xfrm>
-          <a:prstGeom prst="circularArrow">
-            <a:avLst/>
-          </a:prstGeom>
-          <a:solidFill>
-            <a:srgbClr val="1E2761"/>
-          </a:solidFill>
-          <a:ln w="12700" cap="flat" cmpd="sng" algn="ctr">
-            <a:noFill/>
-            <a:prstDash val="solid"/>
-            <a:miter lim="800000"/>
-          </a:ln>
-        </p:spPr>
-        <p:style>
-          <a:lnRef idx="2">
-            <a:schemeClr val="accent1">
-              <a:shade val="15000"/>
-            </a:schemeClr>
-          </a:lnRef>
-          <a:fillRef idx="1">
-            <a:schemeClr val="accent1"/>
-          </a:fillRef>
-          <a:effectRef idx="0">
-            <a:schemeClr val="accent1"/>
-          </a:effectRef>
-          <a:fontRef idx="minor">
-            <a:schemeClr val="lt1"/>
-          </a:fontRef>
-        </p:style>
-        <p:txBody>
-          <a:bodyPr vertOverflow="clip" horzOverflow="clip" rtlCol="0" anchor="t"/>
-          <a:lstStyle/>
-          <a:p>
-            <a:pPr algn="l"/>
-            <a:endParaRPr lang="fr-FR">
-              <a:solidFill>
-                <a:schemeClr val="tx1"/>
-              </a:solidFill>
-            </a:endParaRPr>
-          </a:p>
-        </p:txBody>
-      </p:sp>
-      <p:sp>
-        <p:nvSpPr>
-          <p:cNvPr id="14" name="ZoneTexte 13">
-            <a:extLst>
-              <a:ext uri="{FF2B5EF4-FFF2-40B4-BE49-F238E27FC236}">
-                <a16:creationId xmlns:a16="http://schemas.microsoft.com/office/drawing/2014/main" id="{C7920B55-34BF-4A9D-A5BE-56BFC3494D46}"/>
-              </a:ext>
-            </a:extLst>
-          </p:cNvPr>
-          <p:cNvSpPr txBox="1"/>
-          <p:nvPr/>
-        </p:nvSpPr>
-        <p:spPr>
-          <a:xfrm>
-            <a:off x="5003800" y="3924300"/>
-            <a:ext cx="3556000" cy="381000"/>
-          </a:xfrm>
-          <a:prstGeom prst="rect">
-            <a:avLst/>
-          </a:prstGeom>
-          <a:noFill/>
-        </p:spPr>
-        <p:txBody>
-          <a:bodyPr vertOverflow="overflow" vert="horz" wrap="square" rtlCol="0" anchor="ctr" anchorCtr="0">
-            <a:spAutoFit/>
-          </a:bodyPr>
-          <a:lstStyle/>
-          <a:p>
-            <a:pPr algn="l"/>
-            <a:r>
-              <a:rPr lang="fr-FR" sz="1600" b="1">
+              <a:t>Suivi des imputations et des sujets run &amp; </a:t>
+            </a:r>
+            <a:r>
+              <a:rPr lang="fr-FR" sz="1500" dirty="0" err="1">
                 <a:solidFill>
                   <a:srgbClr val="1E2761"/>
                 </a:solidFill>
                 <a:latin typeface="Calibri"/>
-                <a:ea typeface="Calibri"/>
-                <a:cs typeface="Calibri"/>
-              </a:rPr>
-              <a:t>Amélioration continue</a:t>
-            </a:r>
-          </a:p>
-        </p:txBody>
-      </p:sp>
-      <p:sp>
-        <p:nvSpPr>
-          <p:cNvPr id="15" name="Rectangle : coins arrondis 14">
-            <a:extLst>
-              <a:ext uri="{FF2B5EF4-FFF2-40B4-BE49-F238E27FC236}">
-                <a16:creationId xmlns:a16="http://schemas.microsoft.com/office/drawing/2014/main" id="{98697F35-1F41-4EA9-8E05-338FC5499182}"/>
-              </a:ext>
-            </a:extLst>
-          </p:cNvPr>
-          <p:cNvSpPr/>
-          <p:nvPr/>
-        </p:nvSpPr>
-        <p:spPr>
-          <a:xfrm>
-            <a:off x="800100" y="4699000"/>
-            <a:ext cx="2349500" cy="660400"/>
-          </a:xfrm>
-          <a:prstGeom prst="roundRect">
-            <a:avLst/>
-          </a:prstGeom>
-          <a:solidFill>
-            <a:srgbClr val="1E2761"/>
-          </a:solidFill>
-          <a:ln w="12700" cap="flat" cmpd="sng" algn="ctr">
-            <a:noFill/>
-            <a:prstDash val="solid"/>
-            <a:miter lim="800000"/>
-          </a:ln>
-        </p:spPr>
-        <p:style>
-          <a:lnRef idx="2">
-            <a:schemeClr val="accent1">
-              <a:shade val="15000"/>
-            </a:schemeClr>
-          </a:lnRef>
-          <a:fillRef idx="1">
-            <a:schemeClr val="accent1"/>
-          </a:fillRef>
-          <a:effectRef idx="0">
-            <a:schemeClr val="accent1"/>
-          </a:effectRef>
-          <a:fontRef idx="minor">
-            <a:schemeClr val="lt1"/>
-          </a:fontRef>
-        </p:style>
-        <p:txBody>
-          <a:bodyPr vertOverflow="clip" horzOverflow="clip" wrap="none" rtlCol="0" anchor="ctr" anchorCtr="0">
-            <a:noAutofit/>
-          </a:bodyPr>
-          <a:lstStyle/>
-          <a:p>
-            <a:pPr algn="l"/>
-            <a:r>
-              <a:rPr lang="fr-FR" sz="1400" b="1">
-                <a:solidFill>
-                  <a:srgbClr val="FFFFFF"/>
+              </a:rPr>
+              <a:t>build</a:t>
+            </a:r>
+            <a:r>
+              <a:rPr lang="fr-FR" sz="1500" dirty="0">
+                <a:solidFill>
+                  <a:srgbClr val="1E2761"/>
                 </a:solidFill>
                 <a:latin typeface="Calibri"/>
-                <a:ea typeface="Calibri"/>
-                <a:cs typeface="Calibri"/>
-              </a:rPr>
-              <a:t>Mesurer</a:t>
-            </a:r>
-          </a:p>
-        </p:txBody>
-      </p:sp>
-      <p:sp>
-        <p:nvSpPr>
-          <p:cNvPr id="16" name="Rectangle : coins arrondis 15">
-            <a:extLst>
-              <a:ext uri="{FF2B5EF4-FFF2-40B4-BE49-F238E27FC236}">
-                <a16:creationId xmlns:a16="http://schemas.microsoft.com/office/drawing/2014/main" id="{2835404C-E501-413C-86D6-89E7E6B7863E}"/>
-              </a:ext>
-            </a:extLst>
-          </p:cNvPr>
-          <p:cNvSpPr/>
-          <p:nvPr/>
-        </p:nvSpPr>
-        <p:spPr>
-          <a:xfrm>
-            <a:off x="3530600" y="4699000"/>
-            <a:ext cx="2349500" cy="660400"/>
-          </a:xfrm>
-          <a:prstGeom prst="roundRect">
-            <a:avLst/>
-          </a:prstGeom>
-          <a:solidFill>
-            <a:srgbClr val="1E2761"/>
-          </a:solidFill>
-          <a:ln w="12700" cap="flat" cmpd="sng" algn="ctr">
-            <a:noFill/>
-            <a:prstDash val="solid"/>
-            <a:miter lim="800000"/>
-          </a:ln>
-        </p:spPr>
-        <p:style>
-          <a:lnRef idx="2">
-            <a:schemeClr val="accent1">
-              <a:shade val="15000"/>
-            </a:schemeClr>
-          </a:lnRef>
-          <a:fillRef idx="1">
-            <a:schemeClr val="accent1"/>
-          </a:fillRef>
-          <a:effectRef idx="0">
-            <a:schemeClr val="accent1"/>
-          </a:effectRef>
-          <a:fontRef idx="minor">
-            <a:schemeClr val="lt1"/>
-          </a:fontRef>
-        </p:style>
-        <p:txBody>
-          <a:bodyPr vertOverflow="clip" horzOverflow="clip" wrap="none" rtlCol="0" anchor="ctr" anchorCtr="0">
-            <a:noAutofit/>
-          </a:bodyPr>
-          <a:lstStyle/>
-          <a:p>
-            <a:pPr algn="l"/>
-            <a:r>
-              <a:rPr lang="fr-FR" sz="1400" b="1">
-                <a:solidFill>
-                  <a:srgbClr val="FFFFFF"/>
-                </a:solidFill>
-                <a:latin typeface="Calibri"/>
-                <a:ea typeface="Calibri"/>
-                <a:cs typeface="Calibri"/>
-              </a:rPr>
-              <a:t>Analyser</a:t>
-            </a:r>
-          </a:p>
-        </p:txBody>
-      </p:sp>
-      <p:sp>
-        <p:nvSpPr>
-          <p:cNvPr id="17" name="Rectangle : coins arrondis 16">
-            <a:extLst>
-              <a:ext uri="{FF2B5EF4-FFF2-40B4-BE49-F238E27FC236}">
-                <a16:creationId xmlns:a16="http://schemas.microsoft.com/office/drawing/2014/main" id="{A8972AFF-209B-4DEC-96A3-CE2084B1AA7F}"/>
-              </a:ext>
-            </a:extLst>
-          </p:cNvPr>
-          <p:cNvSpPr/>
-          <p:nvPr/>
-        </p:nvSpPr>
-        <p:spPr>
-          <a:xfrm>
-            <a:off x="6261100" y="4699000"/>
-            <a:ext cx="2349500" cy="660400"/>
-          </a:xfrm>
-          <a:prstGeom prst="roundRect">
-            <a:avLst/>
-          </a:prstGeom>
-          <a:solidFill>
-            <a:srgbClr val="1E2761"/>
-          </a:solidFill>
-          <a:ln w="12700" cap="flat" cmpd="sng" algn="ctr">
-            <a:noFill/>
-            <a:prstDash val="solid"/>
-            <a:miter lim="800000"/>
-          </a:ln>
-        </p:spPr>
-        <p:style>
-          <a:lnRef idx="2">
-            <a:schemeClr val="accent1">
-              <a:shade val="15000"/>
-            </a:schemeClr>
-          </a:lnRef>
-          <a:fillRef idx="1">
-            <a:schemeClr val="accent1"/>
-          </a:fillRef>
-          <a:effectRef idx="0">
-            <a:schemeClr val="accent1"/>
-          </a:effectRef>
-          <a:fontRef idx="minor">
-            <a:schemeClr val="lt1"/>
-          </a:fontRef>
-        </p:style>
-        <p:txBody>
-          <a:bodyPr vertOverflow="clip" horzOverflow="clip" wrap="none" rtlCol="0" anchor="ctr" anchorCtr="0">
-            <a:noAutofit/>
-          </a:bodyPr>
-          <a:lstStyle/>
-          <a:p>
-            <a:pPr algn="l"/>
-            <a:r>
-              <a:rPr lang="fr-FR" sz="1400" b="1">
-                <a:solidFill>
-                  <a:srgbClr val="FFFFFF"/>
-                </a:solidFill>
-                <a:latin typeface="Calibri"/>
-                <a:ea typeface="Calibri"/>
-                <a:cs typeface="Calibri"/>
-              </a:rPr>
-              <a:t>Ajuster</a:t>
-            </a:r>
-          </a:p>
-        </p:txBody>
-      </p:sp>
-      <p:sp>
-        <p:nvSpPr>
-          <p:cNvPr id="18" name="Rectangle : coins arrondis 17">
-            <a:extLst>
-              <a:ext uri="{FF2B5EF4-FFF2-40B4-BE49-F238E27FC236}">
-                <a16:creationId xmlns:a16="http://schemas.microsoft.com/office/drawing/2014/main" id="{440E5A26-8756-4446-8EB3-663819A6DDD9}"/>
-              </a:ext>
-            </a:extLst>
-          </p:cNvPr>
-          <p:cNvSpPr/>
-          <p:nvPr/>
-        </p:nvSpPr>
-        <p:spPr>
-          <a:xfrm>
-            <a:off x="8991600" y="4699000"/>
-            <a:ext cx="2349500" cy="660400"/>
-          </a:xfrm>
-          <a:prstGeom prst="roundRect">
-            <a:avLst/>
-          </a:prstGeom>
-          <a:solidFill>
-            <a:srgbClr val="1E2761"/>
-          </a:solidFill>
-          <a:ln w="12700" cap="flat" cmpd="sng" algn="ctr">
-            <a:noFill/>
-            <a:prstDash val="solid"/>
-            <a:miter lim="800000"/>
-          </a:ln>
-        </p:spPr>
-        <p:style>
-          <a:lnRef idx="2">
-            <a:schemeClr val="accent1">
-              <a:shade val="15000"/>
-            </a:schemeClr>
-          </a:lnRef>
-          <a:fillRef idx="1">
-            <a:schemeClr val="accent1"/>
-          </a:fillRef>
-          <a:effectRef idx="0">
-            <a:schemeClr val="accent1"/>
-          </a:effectRef>
-          <a:fontRef idx="minor">
-            <a:schemeClr val="lt1"/>
-          </a:fontRef>
-        </p:style>
-        <p:txBody>
-          <a:bodyPr vertOverflow="clip" horzOverflow="clip" wrap="none" rtlCol="0" anchor="ctr" anchorCtr="0">
-            <a:noAutofit/>
-          </a:bodyPr>
-          <a:lstStyle/>
-          <a:p>
-            <a:pPr algn="l"/>
-            <a:r>
-              <a:rPr lang="fr-FR" sz="1400" b="1">
-                <a:solidFill>
-                  <a:srgbClr val="FFFFFF"/>
-                </a:solidFill>
-                <a:latin typeface="Calibri"/>
-                <a:ea typeface="Calibri"/>
-                <a:cs typeface="Calibri"/>
-              </a:rPr>
-              <a:t>Déployer</a:t>
-            </a:r>
-          </a:p>
-        </p:txBody>
-      </p:sp>
-      <p:sp>
-        <p:nvSpPr>
-          <p:cNvPr id="19" name="Flèche : droite 18">
-            <a:extLst>
-              <a:ext uri="{FF2B5EF4-FFF2-40B4-BE49-F238E27FC236}">
-                <a16:creationId xmlns:a16="http://schemas.microsoft.com/office/drawing/2014/main" id="{D6A971F0-78F1-4675-A1D2-C47589F1A88A}"/>
-              </a:ext>
-            </a:extLst>
-          </p:cNvPr>
-          <p:cNvSpPr/>
-          <p:nvPr/>
-        </p:nvSpPr>
-        <p:spPr>
-          <a:xfrm>
-            <a:off x="3213100" y="4902200"/>
-            <a:ext cx="254000" cy="254000"/>
-          </a:xfrm>
-          <a:prstGeom prst="rightArrow">
-            <a:avLst/>
-          </a:prstGeom>
-          <a:solidFill>
-            <a:srgbClr val="1E2761"/>
-          </a:solidFill>
-          <a:ln w="12700" cap="flat" cmpd="sng" algn="ctr">
-            <a:noFill/>
-            <a:prstDash val="solid"/>
-            <a:miter lim="800000"/>
-          </a:ln>
-        </p:spPr>
-        <p:style>
-          <a:lnRef idx="2">
-            <a:schemeClr val="accent1">
-              <a:shade val="15000"/>
-            </a:schemeClr>
-          </a:lnRef>
-          <a:fillRef idx="1">
-            <a:schemeClr val="accent1"/>
-          </a:fillRef>
-          <a:effectRef idx="0">
-            <a:schemeClr val="accent1"/>
-          </a:effectRef>
-          <a:fontRef idx="minor">
-            <a:schemeClr val="lt1"/>
-          </a:fontRef>
-        </p:style>
-        <p:txBody>
-          <a:bodyPr vertOverflow="clip" horzOverflow="clip" rtlCol="0" anchor="t"/>
-          <a:lstStyle/>
-          <a:p>
-            <a:pPr algn="l"/>
-            <a:endParaRPr lang="fr-FR"/>
-          </a:p>
-        </p:txBody>
-      </p:sp>
-      <p:sp>
-        <p:nvSpPr>
-          <p:cNvPr id="20" name="Flèche : droite 19">
-            <a:extLst>
-              <a:ext uri="{FF2B5EF4-FFF2-40B4-BE49-F238E27FC236}">
-                <a16:creationId xmlns:a16="http://schemas.microsoft.com/office/drawing/2014/main" id="{38815C07-730B-465F-AA16-63C00B39E98D}"/>
-              </a:ext>
-            </a:extLst>
-          </p:cNvPr>
-          <p:cNvSpPr/>
-          <p:nvPr/>
-        </p:nvSpPr>
-        <p:spPr>
-          <a:xfrm>
-            <a:off x="5943600" y="4902200"/>
-            <a:ext cx="254000" cy="254000"/>
-          </a:xfrm>
-          <a:prstGeom prst="rightArrow">
-            <a:avLst/>
-          </a:prstGeom>
-          <a:solidFill>
-            <a:srgbClr val="1E2761"/>
-          </a:solidFill>
-          <a:ln w="12700" cap="flat" cmpd="sng" algn="ctr">
-            <a:noFill/>
-            <a:prstDash val="solid"/>
-            <a:miter lim="800000"/>
-          </a:ln>
-        </p:spPr>
-        <p:style>
-          <a:lnRef idx="2">
-            <a:schemeClr val="accent1">
-              <a:shade val="15000"/>
-            </a:schemeClr>
-          </a:lnRef>
-          <a:fillRef idx="1">
-            <a:schemeClr val="accent1"/>
-          </a:fillRef>
-          <a:effectRef idx="0">
-            <a:schemeClr val="accent1"/>
-          </a:effectRef>
-          <a:fontRef idx="minor">
-            <a:schemeClr val="lt1"/>
-          </a:fontRef>
-        </p:style>
-        <p:txBody>
-          <a:bodyPr vertOverflow="clip" horzOverflow="clip" rtlCol="0" anchor="t"/>
-          <a:lstStyle/>
-          <a:p>
-            <a:pPr algn="l"/>
-            <a:endParaRPr lang="fr-FR"/>
-          </a:p>
-        </p:txBody>
-      </p:sp>
-      <p:sp>
-        <p:nvSpPr>
-          <p:cNvPr id="21" name="Flèche : droite 20">
-            <a:extLst>
-              <a:ext uri="{FF2B5EF4-FFF2-40B4-BE49-F238E27FC236}">
-                <a16:creationId xmlns:a16="http://schemas.microsoft.com/office/drawing/2014/main" id="{800AF5A9-0BB3-416A-A577-0EACE4F509DD}"/>
-              </a:ext>
-            </a:extLst>
-          </p:cNvPr>
-          <p:cNvSpPr/>
-          <p:nvPr/>
-        </p:nvSpPr>
-        <p:spPr>
-          <a:xfrm>
-            <a:off x="8674100" y="4902200"/>
-            <a:ext cx="254000" cy="254000"/>
-          </a:xfrm>
-          <a:prstGeom prst="rightArrow">
-            <a:avLst/>
-          </a:prstGeom>
-          <a:solidFill>
-            <a:srgbClr val="1E2761"/>
-          </a:solidFill>
-          <a:ln w="12700" cap="flat" cmpd="sng" algn="ctr">
-            <a:noFill/>
-            <a:prstDash val="solid"/>
-            <a:miter lim="800000"/>
-          </a:ln>
-        </p:spPr>
-        <p:style>
-          <a:lnRef idx="2">
-            <a:schemeClr val="accent1">
-              <a:shade val="15000"/>
-            </a:schemeClr>
-          </a:lnRef>
-          <a:fillRef idx="1">
-            <a:schemeClr val="accent1"/>
-          </a:fillRef>
-          <a:effectRef idx="0">
-            <a:schemeClr val="accent1"/>
-          </a:effectRef>
-          <a:fontRef idx="minor">
-            <a:schemeClr val="lt1"/>
-          </a:fontRef>
-        </p:style>
-        <p:txBody>
-          <a:bodyPr vertOverflow="clip" horzOverflow="clip" rtlCol="0" anchor="t"/>
-          <a:lstStyle/>
-          <a:p>
-            <a:pPr algn="l"/>
-            <a:endParaRPr lang="fr-FR"/>
-          </a:p>
-        </p:txBody>
-      </p:sp>
-      <p:sp>
-        <p:nvSpPr>
-          <p:cNvPr id="22" name="ZoneTexte 21">
-            <a:extLst>
-              <a:ext uri="{FF2B5EF4-FFF2-40B4-BE49-F238E27FC236}">
-                <a16:creationId xmlns:a16="http://schemas.microsoft.com/office/drawing/2014/main" id="{6DC10EA3-FE44-4117-8BE3-C3A1209D1772}"/>
-              </a:ext>
-            </a:extLst>
-          </p:cNvPr>
-          <p:cNvSpPr txBox="1"/>
-          <p:nvPr/>
-        </p:nvSpPr>
-        <p:spPr>
-          <a:xfrm>
-            <a:off x="800100" y="5562600"/>
-            <a:ext cx="10566400" cy="330200"/>
-          </a:xfrm>
-          <a:prstGeom prst="rect">
-            <a:avLst/>
-          </a:prstGeom>
-          <a:noFill/>
-        </p:spPr>
-        <p:txBody>
-          <a:bodyPr vertOverflow="overflow" vert="horz" wrap="square" rtlCol="0" anchor="t">
-            <a:spAutoFit/>
-          </a:bodyPr>
-          <a:lstStyle/>
-          <a:p>
-            <a:pPr algn="l"/>
-            <a:r>
-              <a:rPr lang="fr-FR" sz="1200" i="1">
-                <a:solidFill>
-                  <a:srgbClr val="1E2761"/>
-                </a:solidFill>
-                <a:latin typeface="Calibri"/>
-                <a:ea typeface="Calibri"/>
-                <a:cs typeface="Calibri"/>
-              </a:rPr>
-              <a:t>En continu : boucles de feedback via COTECH / COPIL, ajustements du dispositif à chaque palier.</a:t>
+              </a:rPr>
+              <a:t> en COTECH— point hebdomadaire avec l'entité</a:t>
             </a:r>
           </a:p>
         </p:txBody>
@@ -5317,7 +5110,7 @@
     </p:spTree>
     <p:extLst>
       <p:ext uri="{BB962C8B-B14F-4D97-AF65-F5344CB8AC3E}">
-        <p14:creationId xmlns:p14="http://schemas.microsoft.com/office/powerpoint/2010/main" val="1813039442"/>
+        <p14:creationId xmlns:p14="http://schemas.microsoft.com/office/powerpoint/2010/main" val="1579526359"/>
       </p:ext>
     </p:extLst>
   </p:cSld>
@@ -5454,7 +5247,7 @@
           <p:nvPr>
             <p:extLst>
               <p:ext uri="{D42A27DB-BD31-4B8C-83A1-F6EECF244321}">
-                <p14:modId xmlns:p14="http://schemas.microsoft.com/office/powerpoint/2010/main" val="926342585"/>
+                <p14:modId xmlns:p14="http://schemas.microsoft.com/office/powerpoint/2010/main" val="1743910850"/>
               </p:ext>
             </p:extLst>
           </p:nvPr>
@@ -6511,17 +6304,14 @@
                     <a:lstStyle/>
                     <a:p>
                       <a:pPr algn="r"/>
-                      <a:r>
-                        <a:rPr lang="fr-FR" sz="1400" b="1" dirty="0">
-                          <a:solidFill>
-                            <a:srgbClr val="1E2761"/>
-                          </a:solidFill>
-                          <a:latin typeface="Calibri"/>
-                          <a:ea typeface="Calibri"/>
-                          <a:cs typeface="Calibri"/>
-                        </a:rPr>
-                        <a:t>3670</a:t>
-                      </a:r>
+                      <a:endParaRPr lang="fr-FR" sz="1400" b="1" dirty="0">
+                        <a:solidFill>
+                          <a:srgbClr val="1E2761"/>
+                        </a:solidFill>
+                        <a:latin typeface="Calibri"/>
+                        <a:ea typeface="Calibri"/>
+                        <a:cs typeface="Calibri"/>
+                      </a:endParaRPr>
                     </a:p>
                   </a:txBody>
                   <a:tcPr anchor="ctr">
@@ -6545,7 +6335,7 @@
                           <a:ea typeface="Calibri"/>
                           <a:cs typeface="Calibri"/>
                         </a:rPr>
-                        <a:t>1 076 144 à 1 384 424</a:t>
+                        <a:t>409 484 à 1 384 424</a:t>
                       </a:r>
                     </a:p>
                     <a:p>
@@ -17008,7 +16798,7 @@
     <p:bg>
       <p:bgPr>
         <a:solidFill>
-          <a:srgbClr val="FFFFFF">
+          <a:srgbClr val="121636">
             <a:alpha val="100000"/>
           </a:srgbClr>
         </a:solidFill>
@@ -17034,7 +16824,7 @@
           <p:cNvPr id="2" name="ZoneTexte 1">
             <a:extLst>
               <a:ext uri="{FF2B5EF4-FFF2-40B4-BE49-F238E27FC236}">
-                <a16:creationId xmlns:a16="http://schemas.microsoft.com/office/drawing/2014/main" id="{6BD2141C-E89E-4123-BC3D-E519C8B825CC}"/>
+                <a16:creationId xmlns:a16="http://schemas.microsoft.com/office/drawing/2014/main" id="{C9F67004-9A52-426C-AF90-4EA6D15420C6}"/>
               </a:ext>
             </a:extLst>
           </p:cNvPr>
@@ -17044,7 +16834,7 @@
         <p:spPr>
           <a:xfrm>
             <a:off x="546100" y="368300"/>
-            <a:ext cx="10972800" cy="553998"/>
+            <a:ext cx="10972800" cy="635000"/>
           </a:xfrm>
           <a:prstGeom prst="rect">
             <a:avLst/>
@@ -17052,21 +16842,21 @@
           <a:noFill/>
         </p:spPr>
         <p:txBody>
-          <a:bodyPr vertOverflow="overflow" vert="horz" wrap="square" rtlCol="0" anchor="t">
+          <a:bodyPr vertOverflow="overflow" vert="horz" wrap="square" rtlCol="0" anchor="ctr" anchorCtr="0">
             <a:spAutoFit/>
           </a:bodyPr>
           <a:lstStyle/>
           <a:p>
             <a:pPr algn="l"/>
             <a:r>
-              <a:rPr lang="fr-FR" sz="3000" b="1" dirty="0">
-                <a:solidFill>
-                  <a:srgbClr val="1E2761"/>
+              <a:rPr lang="fr-FR" sz="3000" b="1">
+                <a:solidFill>
+                  <a:srgbClr val="FFFFFF"/>
                 </a:solidFill>
                 <a:latin typeface="Cambria"/>
                 <a:ea typeface="Cambria"/>
               </a:rPr>
-              <a:t>Gouvernance capacitaire &amp; agile</a:t>
+              <a:t>Gouvernance des processus</a:t>
             </a:r>
           </a:p>
         </p:txBody>
@@ -17076,7 +16866,7 @@
           <p:cNvPr id="3" name="ZoneTexte 2">
             <a:extLst>
               <a:ext uri="{FF2B5EF4-FFF2-40B4-BE49-F238E27FC236}">
-                <a16:creationId xmlns:a16="http://schemas.microsoft.com/office/drawing/2014/main" id="{D21A1403-30EB-40F7-8EE8-E9D73BAF5717}"/>
+                <a16:creationId xmlns:a16="http://schemas.microsoft.com/office/drawing/2014/main" id="{A25B86E4-4B2F-47C9-9063-58B2CA8BBB9B}"/>
               </a:ext>
             </a:extLst>
           </p:cNvPr>
@@ -17085,8 +16875,8 @@
         </p:nvSpPr>
         <p:spPr>
           <a:xfrm>
-            <a:off x="546100" y="1346200"/>
-            <a:ext cx="10972800" cy="363220"/>
+            <a:off x="546100" y="1041400"/>
+            <a:ext cx="10972800" cy="406400"/>
           </a:xfrm>
           <a:prstGeom prst="rect">
             <a:avLst/>
@@ -17101,111 +16891,590 @@
           <a:p>
             <a:pPr algn="l"/>
             <a:r>
-              <a:rPr lang="fr-FR" sz="1300">
-                <a:solidFill>
-                  <a:srgbClr val="44507A"/>
+              <a:rPr lang="fr-FR" sz="1600">
+                <a:solidFill>
+                  <a:srgbClr val="B8C4E8"/>
                 </a:solidFill>
                 <a:latin typeface="Calibri"/>
                 <a:ea typeface="Calibri"/>
                 <a:cs typeface="Calibri"/>
               </a:rPr>
-              <a:t>Pilotage : Souha TIBI</a:t>
-            </a:r>
-          </a:p>
-        </p:txBody>
-      </p:sp>
-      <p:sp>
-        <p:nvSpPr>
-          <p:cNvPr id="4" name="ZoneTexte 3">
+              <a:t>Outils et instances de suivi associés à chaque processus opérationnel.</a:t>
+            </a:r>
+          </a:p>
+        </p:txBody>
+      </p:sp>
+      <p:graphicFrame>
+        <p:nvGraphicFramePr>
+          <p:cNvPr id="5" name="Tableau 4">
             <a:extLst>
               <a:ext uri="{FF2B5EF4-FFF2-40B4-BE49-F238E27FC236}">
-                <a16:creationId xmlns:a16="http://schemas.microsoft.com/office/drawing/2014/main" id="{18CA5B18-6FB9-4573-8A4C-F8755A83188F}"/>
+                <a16:creationId xmlns:a16="http://schemas.microsoft.com/office/drawing/2014/main" id="{247B4177-B2DB-40D5-985B-19DBC7553199}"/>
               </a:ext>
             </a:extLst>
           </p:cNvPr>
-          <p:cNvSpPr txBox="1"/>
-          <p:nvPr/>
-        </p:nvSpPr>
-        <p:spPr>
-          <a:xfrm>
-            <a:off x="546100" y="1701800"/>
-            <a:ext cx="10972800" cy="447040"/>
-          </a:xfrm>
-          <a:prstGeom prst="rect">
-            <a:avLst/>
-          </a:prstGeom>
-          <a:noFill/>
-        </p:spPr>
-        <p:txBody>
-          <a:bodyPr vertOverflow="overflow" vert="horz" wrap="square" rtlCol="0" anchor="t">
-            <a:spAutoFit/>
-          </a:bodyPr>
-          <a:lstStyle/>
-          <a:p>
-            <a:pPr algn="l"/>
-            <a:r>
-              <a:rPr lang="fr-FR" sz="1600" b="1" dirty="0">
-                <a:solidFill>
-                  <a:srgbClr val="1E2761"/>
-                </a:solidFill>
-                <a:latin typeface="Calibri"/>
-                <a:ea typeface="Calibri"/>
-                <a:cs typeface="Calibri"/>
-              </a:rPr>
-              <a:t>Instances de pilotage</a:t>
-            </a:r>
-          </a:p>
-        </p:txBody>
-      </p:sp>
-      <p:sp>
-        <p:nvSpPr>
-          <p:cNvPr id="5" name="ZoneTexte 4">
+          <p:cNvGraphicFramePr>
+            <a:graphicFrameLocks noGrp="1"/>
+          </p:cNvGraphicFramePr>
+          <p:nvPr/>
+        </p:nvGraphicFramePr>
+        <p:xfrm>
+          <a:off x="546100" y="1651000"/>
+          <a:ext cx="11099800" cy="4064000"/>
+        </p:xfrm>
+        <a:graphic>
+          <a:graphicData uri="http://schemas.openxmlformats.org/drawingml/2006/table">
+            <a:tbl>
+              <a:tblPr firstRow="1" bandRow="1">
+                <a:tableStyleId>{5C22544A-7EE6-4342-B048-85BDC9FD1C3A}</a:tableStyleId>
+              </a:tblPr>
+              <a:tblGrid>
+                <a:gridCol w="3175000">
+                  <a:extLst>
+                    <a:ext uri="{9D8B030D-6E8A-4147-A177-3AD203B41FA5}">
+                      <a16:colId xmlns:a16="http://schemas.microsoft.com/office/drawing/2014/main" val="853324074"/>
+                    </a:ext>
+                  </a:extLst>
+                </a:gridCol>
+                <a:gridCol w="4318000">
+                  <a:extLst>
+                    <a:ext uri="{9D8B030D-6E8A-4147-A177-3AD203B41FA5}">
+                      <a16:colId xmlns:a16="http://schemas.microsoft.com/office/drawing/2014/main" val="897674765"/>
+                    </a:ext>
+                  </a:extLst>
+                </a:gridCol>
+                <a:gridCol w="3606800">
+                  <a:extLst>
+                    <a:ext uri="{9D8B030D-6E8A-4147-A177-3AD203B41FA5}">
+                      <a16:colId xmlns:a16="http://schemas.microsoft.com/office/drawing/2014/main" val="1706787244"/>
+                    </a:ext>
+                  </a:extLst>
+                </a:gridCol>
+              </a:tblGrid>
+              <a:tr h="508000">
+                <a:tc>
+                  <a:txBody>
+                    <a:bodyPr/>
+                    <a:lstStyle/>
+                    <a:p>
+                      <a:pPr algn="l"/>
+                      <a:r>
+                        <a:rPr lang="fr-FR" sz="1500" b="1">
+                          <a:solidFill>
+                            <a:srgbClr val="121636"/>
+                          </a:solidFill>
+                          <a:latin typeface="Calibri"/>
+                          <a:ea typeface="Calibri"/>
+                          <a:cs typeface="Calibri"/>
+                        </a:rPr>
+                        <a:t>Processus</a:t>
+                      </a:r>
+                    </a:p>
+                  </a:txBody>
+                  <a:tcPr anchor="ctr">
+                    <a:solidFill>
+                      <a:srgbClr val="F2A93B"/>
+                    </a:solidFill>
+                  </a:tcPr>
+                </a:tc>
+                <a:tc>
+                  <a:txBody>
+                    <a:bodyPr/>
+                    <a:lstStyle/>
+                    <a:p>
+                      <a:pPr algn="l"/>
+                      <a:r>
+                        <a:rPr lang="fr-FR" sz="1500" b="1">
+                          <a:solidFill>
+                            <a:srgbClr val="121636"/>
+                          </a:solidFill>
+                          <a:latin typeface="Calibri"/>
+                          <a:ea typeface="Calibri"/>
+                          <a:cs typeface="Calibri"/>
+                        </a:rPr>
+                        <a:t>Outils</a:t>
+                      </a:r>
+                    </a:p>
+                  </a:txBody>
+                  <a:tcPr anchor="ctr">
+                    <a:solidFill>
+                      <a:srgbClr val="F2A93B"/>
+                    </a:solidFill>
+                  </a:tcPr>
+                </a:tc>
+                <a:tc>
+                  <a:txBody>
+                    <a:bodyPr/>
+                    <a:lstStyle/>
+                    <a:p>
+                      <a:pPr algn="l"/>
+                      <a:r>
+                        <a:rPr lang="fr-FR" sz="1500" b="1">
+                          <a:solidFill>
+                            <a:srgbClr val="121636"/>
+                          </a:solidFill>
+                          <a:latin typeface="Calibri"/>
+                          <a:ea typeface="Calibri"/>
+                          <a:cs typeface="Calibri"/>
+                        </a:rPr>
+                        <a:t>Instance de suivi</a:t>
+                      </a:r>
+                    </a:p>
+                  </a:txBody>
+                  <a:tcPr anchor="ctr">
+                    <a:solidFill>
+                      <a:srgbClr val="F2A93B"/>
+                    </a:solidFill>
+                  </a:tcPr>
+                </a:tc>
+                <a:extLst>
+                  <a:ext uri="{0D108BD9-81ED-4DB2-BD59-A6C34878D82A}">
+                    <a16:rowId xmlns:a16="http://schemas.microsoft.com/office/drawing/2014/main" val="2947908947"/>
+                  </a:ext>
+                </a:extLst>
+              </a:tr>
+              <a:tr h="711200">
+                <a:tc>
+                  <a:txBody>
+                    <a:bodyPr/>
+                    <a:lstStyle/>
+                    <a:p>
+                      <a:pPr algn="l"/>
+                      <a:r>
+                        <a:rPr lang="fr-FR" sz="1400" b="1" dirty="0">
+                          <a:solidFill>
+                            <a:srgbClr val="FFFFFF"/>
+                          </a:solidFill>
+                          <a:latin typeface="Calibri"/>
+                          <a:ea typeface="Calibri"/>
+                          <a:cs typeface="Calibri"/>
+                        </a:rPr>
+                        <a:t>La gestion des incidents</a:t>
+                      </a:r>
+                    </a:p>
+                  </a:txBody>
+                  <a:tcPr anchor="ctr">
+                    <a:solidFill>
+                      <a:srgbClr val="1B2150"/>
+                    </a:solidFill>
+                  </a:tcPr>
+                </a:tc>
+                <a:tc>
+                  <a:txBody>
+                    <a:bodyPr/>
+                    <a:lstStyle/>
+                    <a:p>
+                      <a:pPr algn="l"/>
+                      <a:r>
+                        <a:rPr lang="fr-FR" sz="1400" b="0" dirty="0" err="1">
+                          <a:solidFill>
+                            <a:srgbClr val="FFFFFF"/>
+                          </a:solidFill>
+                          <a:latin typeface="Calibri"/>
+                          <a:ea typeface="Calibri"/>
+                          <a:cs typeface="Calibri"/>
+                        </a:rPr>
+                        <a:t>ServiceNow</a:t>
+                      </a:r>
+                      <a:r>
+                        <a:rPr lang="fr-FR" sz="1400" b="0" dirty="0">
+                          <a:solidFill>
+                            <a:srgbClr val="FFFFFF"/>
+                          </a:solidFill>
+                          <a:latin typeface="Calibri"/>
+                          <a:ea typeface="Calibri"/>
+                          <a:cs typeface="Calibri"/>
+                        </a:rPr>
+                        <a:t> (ITSM), outils de supervision et d'alerte</a:t>
+                      </a:r>
+                    </a:p>
+                  </a:txBody>
+                  <a:tcPr anchor="ctr">
+                    <a:solidFill>
+                      <a:srgbClr val="1B2150"/>
+                    </a:solidFill>
+                  </a:tcPr>
+                </a:tc>
+                <a:tc>
+                  <a:txBody>
+                    <a:bodyPr/>
+                    <a:lstStyle/>
+                    <a:p>
+                      <a:pPr algn="l"/>
+                      <a:r>
+                        <a:rPr lang="fr-FR" sz="1400" b="0" dirty="0">
+                          <a:solidFill>
+                            <a:srgbClr val="FFFFFF"/>
+                          </a:solidFill>
+                          <a:latin typeface="Calibri"/>
+                          <a:ea typeface="Calibri"/>
+                          <a:cs typeface="Calibri"/>
+                        </a:rPr>
+                        <a:t>Revue opérationnelle hebdomadaire</a:t>
+                      </a:r>
+                    </a:p>
+                  </a:txBody>
+                  <a:tcPr anchor="ctr">
+                    <a:solidFill>
+                      <a:srgbClr val="1B2150"/>
+                    </a:solidFill>
+                  </a:tcPr>
+                </a:tc>
+                <a:extLst>
+                  <a:ext uri="{0D108BD9-81ED-4DB2-BD59-A6C34878D82A}">
+                    <a16:rowId xmlns:a16="http://schemas.microsoft.com/office/drawing/2014/main" val="2829448253"/>
+                  </a:ext>
+                </a:extLst>
+              </a:tr>
+              <a:tr h="711200">
+                <a:tc>
+                  <a:txBody>
+                    <a:bodyPr/>
+                    <a:lstStyle/>
+                    <a:p>
+                      <a:pPr algn="l"/>
+                      <a:r>
+                        <a:rPr lang="fr-FR" sz="1400" b="1" dirty="0">
+                          <a:solidFill>
+                            <a:srgbClr val="FFFFFF"/>
+                          </a:solidFill>
+                          <a:latin typeface="Calibri"/>
+                          <a:ea typeface="Calibri"/>
+                          <a:cs typeface="Calibri"/>
+                        </a:rPr>
+                        <a:t>La gestion des changements</a:t>
+                      </a:r>
+                    </a:p>
+                  </a:txBody>
+                  <a:tcPr anchor="ctr">
+                    <a:solidFill>
+                      <a:srgbClr val="232B5E"/>
+                    </a:solidFill>
+                  </a:tcPr>
+                </a:tc>
+                <a:tc>
+                  <a:txBody>
+                    <a:bodyPr/>
+                    <a:lstStyle/>
+                    <a:p>
+                      <a:pPr algn="l"/>
+                      <a:r>
+                        <a:rPr lang="fr-FR" sz="1400" b="0" dirty="0" err="1">
+                          <a:solidFill>
+                            <a:srgbClr val="FFFFFF"/>
+                          </a:solidFill>
+                          <a:latin typeface="Calibri"/>
+                          <a:ea typeface="Calibri"/>
+                          <a:cs typeface="Calibri"/>
+                        </a:rPr>
+                        <a:t>ServiceNow</a:t>
+                      </a:r>
+                      <a:r>
+                        <a:rPr lang="fr-FR" sz="1400" b="0" dirty="0">
+                          <a:solidFill>
+                            <a:srgbClr val="FFFFFF"/>
+                          </a:solidFill>
+                          <a:latin typeface="Calibri"/>
+                          <a:ea typeface="Calibri"/>
+                          <a:cs typeface="Calibri"/>
+                        </a:rPr>
+                        <a:t> (module Change)</a:t>
+                      </a:r>
+                    </a:p>
+                  </a:txBody>
+                  <a:tcPr anchor="ctr">
+                    <a:solidFill>
+                      <a:srgbClr val="232B5E"/>
+                    </a:solidFill>
+                  </a:tcPr>
+                </a:tc>
+                <a:tc>
+                  <a:txBody>
+                    <a:bodyPr/>
+                    <a:lstStyle/>
+                    <a:p>
+                      <a:pPr algn="l"/>
+                      <a:r>
+                        <a:rPr lang="fr-FR" sz="1400" b="0" dirty="0">
+                          <a:solidFill>
+                            <a:srgbClr val="FFFFFF"/>
+                          </a:solidFill>
+                          <a:latin typeface="Calibri"/>
+                          <a:ea typeface="Calibri"/>
+                          <a:cs typeface="Calibri"/>
+                        </a:rPr>
+                        <a:t>CAB</a:t>
+                      </a:r>
+                    </a:p>
+                  </a:txBody>
+                  <a:tcPr anchor="ctr">
+                    <a:solidFill>
+                      <a:srgbClr val="232B5E"/>
+                    </a:solidFill>
+                  </a:tcPr>
+                </a:tc>
+                <a:extLst>
+                  <a:ext uri="{0D108BD9-81ED-4DB2-BD59-A6C34878D82A}">
+                    <a16:rowId xmlns:a16="http://schemas.microsoft.com/office/drawing/2014/main" val="1457706701"/>
+                  </a:ext>
+                </a:extLst>
+              </a:tr>
+              <a:tr h="711200">
+                <a:tc>
+                  <a:txBody>
+                    <a:bodyPr/>
+                    <a:lstStyle/>
+                    <a:p>
+                      <a:pPr algn="l"/>
+                      <a:r>
+                        <a:rPr lang="fr-FR" sz="1400" b="1">
+                          <a:solidFill>
+                            <a:srgbClr val="FFFFFF"/>
+                          </a:solidFill>
+                          <a:latin typeface="Calibri"/>
+                          <a:ea typeface="Calibri"/>
+                          <a:cs typeface="Calibri"/>
+                        </a:rPr>
+                        <a:t>La gestion de projet</a:t>
+                      </a:r>
+                    </a:p>
+                  </a:txBody>
+                  <a:tcPr anchor="ctr">
+                    <a:solidFill>
+                      <a:srgbClr val="1B2150"/>
+                    </a:solidFill>
+                  </a:tcPr>
+                </a:tc>
+                <a:tc>
+                  <a:txBody>
+                    <a:bodyPr/>
+                    <a:lstStyle/>
+                    <a:p>
+                      <a:pPr algn="l"/>
+                      <a:r>
+                        <a:rPr lang="fr-FR" sz="1400" b="0" dirty="0">
+                          <a:solidFill>
+                            <a:srgbClr val="FFFFFF"/>
+                          </a:solidFill>
+                          <a:latin typeface="Calibri"/>
+                          <a:ea typeface="Calibri"/>
+                          <a:cs typeface="Calibri"/>
+                        </a:rPr>
+                        <a:t>Jira</a:t>
+                      </a:r>
+                    </a:p>
+                  </a:txBody>
+                  <a:tcPr anchor="ctr">
+                    <a:solidFill>
+                      <a:srgbClr val="1B2150"/>
+                    </a:solidFill>
+                  </a:tcPr>
+                </a:tc>
+                <a:tc>
+                  <a:txBody>
+                    <a:bodyPr/>
+                    <a:lstStyle/>
+                    <a:p>
+                      <a:pPr algn="l"/>
+                      <a:r>
+                        <a:rPr lang="fr-FR" sz="1400" b="0" dirty="0">
+                          <a:solidFill>
+                            <a:srgbClr val="FFFFFF"/>
+                          </a:solidFill>
+                          <a:latin typeface="Calibri"/>
+                          <a:ea typeface="Calibri"/>
+                          <a:cs typeface="Calibri"/>
+                        </a:rPr>
+                        <a:t>COPIL projet</a:t>
+                      </a:r>
+                    </a:p>
+                  </a:txBody>
+                  <a:tcPr anchor="ctr">
+                    <a:solidFill>
+                      <a:srgbClr val="1B2150"/>
+                    </a:solidFill>
+                  </a:tcPr>
+                </a:tc>
+                <a:extLst>
+                  <a:ext uri="{0D108BD9-81ED-4DB2-BD59-A6C34878D82A}">
+                    <a16:rowId xmlns:a16="http://schemas.microsoft.com/office/drawing/2014/main" val="1011917781"/>
+                  </a:ext>
+                </a:extLst>
+              </a:tr>
+              <a:tr h="711200">
+                <a:tc>
+                  <a:txBody>
+                    <a:bodyPr/>
+                    <a:lstStyle/>
+                    <a:p>
+                      <a:pPr algn="l"/>
+                      <a:r>
+                        <a:rPr lang="fr-FR" sz="1400" b="1">
+                          <a:solidFill>
+                            <a:srgbClr val="FFFFFF"/>
+                          </a:solidFill>
+                          <a:latin typeface="Calibri"/>
+                          <a:ea typeface="Calibri"/>
+                          <a:cs typeface="Calibri"/>
+                        </a:rPr>
+                        <a:t>La mesure de la satisfaction</a:t>
+                      </a:r>
+                    </a:p>
+                  </a:txBody>
+                  <a:tcPr anchor="ctr">
+                    <a:solidFill>
+                      <a:srgbClr val="232B5E"/>
+                    </a:solidFill>
+                  </a:tcPr>
+                </a:tc>
+                <a:tc>
+                  <a:txBody>
+                    <a:bodyPr/>
+                    <a:lstStyle/>
+                    <a:p>
+                      <a:pPr algn="l"/>
+                      <a:r>
+                        <a:rPr lang="fr-FR" sz="1400" b="0" dirty="0">
+                          <a:solidFill>
+                            <a:srgbClr val="FFFFFF"/>
+                          </a:solidFill>
+                          <a:latin typeface="Calibri"/>
+                          <a:ea typeface="Calibri"/>
+                          <a:cs typeface="Calibri"/>
+                        </a:rPr>
+                        <a:t>CSE opérationnelle et stratégique spécifique</a:t>
+                      </a:r>
+                    </a:p>
+                  </a:txBody>
+                  <a:tcPr anchor="ctr">
+                    <a:solidFill>
+                      <a:srgbClr val="232B5E"/>
+                    </a:solidFill>
+                  </a:tcPr>
+                </a:tc>
+                <a:tc>
+                  <a:txBody>
+                    <a:bodyPr/>
+                    <a:lstStyle/>
+                    <a:p>
+                      <a:pPr algn="l"/>
+                      <a:r>
+                        <a:rPr lang="fr-FR" sz="1400" b="0" dirty="0">
+                          <a:solidFill>
+                            <a:srgbClr val="FFFFFF"/>
+                          </a:solidFill>
+                          <a:latin typeface="Calibri"/>
+                          <a:ea typeface="Calibri"/>
+                          <a:cs typeface="Calibri"/>
+                        </a:rPr>
+                        <a:t>COPIL</a:t>
+                      </a:r>
+                    </a:p>
+                  </a:txBody>
+                  <a:tcPr anchor="ctr">
+                    <a:solidFill>
+                      <a:srgbClr val="232B5E"/>
+                    </a:solidFill>
+                  </a:tcPr>
+                </a:tc>
+                <a:extLst>
+                  <a:ext uri="{0D108BD9-81ED-4DB2-BD59-A6C34878D82A}">
+                    <a16:rowId xmlns:a16="http://schemas.microsoft.com/office/drawing/2014/main" val="1250094303"/>
+                  </a:ext>
+                </a:extLst>
+              </a:tr>
+              <a:tr h="711200">
+                <a:tc>
+                  <a:txBody>
+                    <a:bodyPr/>
+                    <a:lstStyle/>
+                    <a:p>
+                      <a:pPr algn="l"/>
+                      <a:r>
+                        <a:rPr lang="fr-FR" sz="1400" b="1" dirty="0">
+                          <a:solidFill>
+                            <a:srgbClr val="FFFFFF"/>
+                          </a:solidFill>
+                          <a:latin typeface="Calibri"/>
+                          <a:ea typeface="Calibri"/>
+                          <a:cs typeface="Calibri"/>
+                        </a:rPr>
+                        <a:t>La gestion budgétaire</a:t>
+                      </a:r>
+                    </a:p>
+                  </a:txBody>
+                  <a:tcPr anchor="ctr">
+                    <a:solidFill>
+                      <a:srgbClr val="1B2150"/>
+                    </a:solidFill>
+                  </a:tcPr>
+                </a:tc>
+                <a:tc>
+                  <a:txBody>
+                    <a:bodyPr/>
+                    <a:lstStyle/>
+                    <a:p>
+                      <a:pPr algn="l"/>
+                      <a:r>
+                        <a:rPr lang="fr-FR" sz="1400" b="0" dirty="0">
+                          <a:solidFill>
+                            <a:srgbClr val="FFFFFF"/>
+                          </a:solidFill>
+                          <a:latin typeface="Calibri"/>
+                          <a:ea typeface="Calibri"/>
+                          <a:cs typeface="Calibri"/>
+                        </a:rPr>
+                        <a:t>Suivi des priorités et des livrables</a:t>
+                      </a:r>
+                    </a:p>
+                  </a:txBody>
+                  <a:tcPr anchor="ctr">
+                    <a:solidFill>
+                      <a:srgbClr val="1B2150"/>
+                    </a:solidFill>
+                  </a:tcPr>
+                </a:tc>
+                <a:tc>
+                  <a:txBody>
+                    <a:bodyPr/>
+                    <a:lstStyle/>
+                    <a:p>
+                      <a:pPr algn="l"/>
+                      <a:r>
+                        <a:rPr lang="fr-FR" sz="1400" b="0" dirty="0">
+                          <a:solidFill>
+                            <a:srgbClr val="FFFFFF"/>
+                          </a:solidFill>
+                          <a:latin typeface="Calibri"/>
+                          <a:ea typeface="Calibri"/>
+                          <a:cs typeface="Calibri"/>
+                        </a:rPr>
+                        <a:t>COTECH</a:t>
+                      </a:r>
+                    </a:p>
+                  </a:txBody>
+                  <a:tcPr anchor="ctr">
+                    <a:solidFill>
+                      <a:srgbClr val="1B2150"/>
+                    </a:solidFill>
+                  </a:tcPr>
+                </a:tc>
+                <a:extLst>
+                  <a:ext uri="{0D108BD9-81ED-4DB2-BD59-A6C34878D82A}">
+                    <a16:rowId xmlns:a16="http://schemas.microsoft.com/office/drawing/2014/main" val="2867049944"/>
+                  </a:ext>
+                </a:extLst>
+              </a:tr>
+            </a:tbl>
+          </a:graphicData>
+        </a:graphic>
+      </p:graphicFrame>
+      <p:sp>
+        <p:nvSpPr>
+          <p:cNvPr id="6" name="Rectangle 5">
             <a:extLst>
               <a:ext uri="{FF2B5EF4-FFF2-40B4-BE49-F238E27FC236}">
-                <a16:creationId xmlns:a16="http://schemas.microsoft.com/office/drawing/2014/main" id="{732AE13D-52C5-4538-88B5-626C9A2E54F8}"/>
-              </a:ext>
-            </a:extLst>
-          </p:cNvPr>
-          <p:cNvSpPr txBox="1"/>
-          <p:nvPr/>
-        </p:nvSpPr>
-        <p:spPr>
-          <a:xfrm>
-            <a:off x="546100" y="5410200"/>
-            <a:ext cx="10972800" cy="447040"/>
-          </a:xfrm>
-          <a:prstGeom prst="rect">
-            <a:avLst/>
-          </a:prstGeom>
-          <a:noFill/>
-        </p:spPr>
-        <p:txBody>
-          <a:bodyPr vertOverflow="overflow" vert="horz" wrap="square" rtlCol="0" anchor="t">
-            <a:spAutoFit/>
-          </a:bodyPr>
-          <a:lstStyle/>
-          <a:p>
-            <a:pPr algn="l"/>
-            <a:r>
-              <a:rPr lang="fr-FR" sz="1600" b="1">
-                <a:solidFill>
-                  <a:srgbClr val="1E2761"/>
-                </a:solidFill>
-                <a:latin typeface="Calibri"/>
-                <a:ea typeface="Calibri"/>
-                <a:cs typeface="Calibri"/>
-              </a:rPr>
-              <a:t>Mode de fonctionnement</a:t>
-            </a:r>
-          </a:p>
-        </p:txBody>
-      </p:sp>
-      <p:sp>
-        <p:nvSpPr>
-          <p:cNvPr id="6" name="Rectangle : coins arrondis 5">
-            <a:extLst>
-              <a:ext uri="{FF2B5EF4-FFF2-40B4-BE49-F238E27FC236}">
-                <a16:creationId xmlns:a16="http://schemas.microsoft.com/office/drawing/2014/main" id="{F28EAA2A-70D1-4F95-9F6F-628C01483D9D}"/>
+                <a16:creationId xmlns:a16="http://schemas.microsoft.com/office/drawing/2014/main" id="{1CCAC0A6-D5B4-4E7C-88A6-0A6F9F327BE5}"/>
               </a:ext>
             </a:extLst>
           </p:cNvPr>
@@ -17214,14 +17483,14 @@
         </p:nvSpPr>
         <p:spPr>
           <a:xfrm>
-            <a:off x="546100" y="2209800"/>
-            <a:ext cx="3479800" cy="3073400"/>
-          </a:xfrm>
-          <a:prstGeom prst="roundRect">
+            <a:off x="546100" y="5867400"/>
+            <a:ext cx="63500" cy="889000"/>
+          </a:xfrm>
+          <a:prstGeom prst="rect">
             <a:avLst/>
           </a:prstGeom>
           <a:solidFill>
-            <a:srgbClr val="1E2761"/>
+            <a:srgbClr val="F2A93B"/>
           </a:solidFill>
           <a:ln w="12700" cap="flat" cmpd="sng" algn="ctr">
             <a:noFill/>
@@ -17246,192 +17515,20 @@
           </a:fontRef>
         </p:style>
         <p:txBody>
-          <a:bodyPr vertOverflow="clip" horzOverflow="clip" wrap="square" rtlCol="0" anchor="t" anchorCtr="0">
-            <a:noAutofit/>
-          </a:bodyPr>
-          <a:lstStyle/>
-          <a:p>
-            <a:pPr marL="0" indent="0" algn="l">
-              <a:spcAft>
-                <a:spcPts val="100"/>
-              </a:spcAft>
-              <a:buNone/>
-            </a:pPr>
-            <a:r>
-              <a:rPr lang="fr-FR" sz="1800" b="1" dirty="0">
-                <a:solidFill>
-                  <a:srgbClr val="FFFFFF"/>
-                </a:solidFill>
-                <a:latin typeface="Calibri"/>
-              </a:rPr>
-              <a:t>COTECH</a:t>
-            </a:r>
-          </a:p>
-          <a:p>
-            <a:pPr marL="0" indent="0" algn="l">
-              <a:buNone/>
-            </a:pPr>
-            <a:r>
-              <a:rPr lang="fr-FR" sz="1400" i="1" dirty="0">
-                <a:solidFill>
-                  <a:schemeClr val="accent5">
-                    <a:lumMod val="60000"/>
-                    <a:lumOff val="40000"/>
-                  </a:schemeClr>
-                </a:solidFill>
-                <a:latin typeface="Calibri"/>
-              </a:rPr>
-              <a:t>Toutes les 2 semaines</a:t>
-            </a:r>
-          </a:p>
-          <a:p>
-            <a:pPr marL="0" indent="0" algn="l">
-              <a:spcBef>
-                <a:spcPts val="300"/>
-              </a:spcBef>
-              <a:buNone/>
-            </a:pPr>
-            <a:r>
-              <a:rPr lang="fr-FR" sz="1400" dirty="0">
-                <a:solidFill>
-                  <a:srgbClr val="DDE0EE"/>
-                </a:solidFill>
-                <a:latin typeface="Calibri"/>
-              </a:rPr>
-              <a:t>Suivi du build &amp; run, arbitrages techniques, revue des risques, des priorisations </a:t>
-            </a:r>
-            <a:r>
-              <a:rPr lang="fr-FR" sz="1400" dirty="0" err="1">
-                <a:solidFill>
-                  <a:srgbClr val="DDE0EE"/>
-                </a:solidFill>
-                <a:latin typeface="Calibri"/>
-              </a:rPr>
-              <a:t>build</a:t>
-            </a:r>
-            <a:r>
-              <a:rPr lang="fr-FR" sz="1400" dirty="0">
-                <a:solidFill>
-                  <a:srgbClr val="DDE0EE"/>
-                </a:solidFill>
-                <a:latin typeface="Calibri"/>
-              </a:rPr>
-              <a:t> &amp; run.</a:t>
-            </a:r>
-          </a:p>
-          <a:p>
-            <a:pPr marL="0" indent="0" algn="l">
-              <a:spcBef>
-                <a:spcPts val="300"/>
-              </a:spcBef>
-              <a:buNone/>
-            </a:pPr>
-            <a:br>
-              <a:rPr lang="fr-FR" sz="1400" dirty="0">
-                <a:solidFill>
-                  <a:srgbClr val="DDE0EE"/>
-                </a:solidFill>
-                <a:latin typeface="Calibri"/>
-              </a:rPr>
-            </a:br>
-            <a:endParaRPr lang="fr-FR" sz="1400" dirty="0">
-              <a:solidFill>
-                <a:srgbClr val="DDE0EE"/>
-              </a:solidFill>
-              <a:latin typeface="Calibri"/>
-            </a:endParaRPr>
-          </a:p>
-          <a:p>
-            <a:pPr>
-              <a:spcBef>
-                <a:spcPts val="300"/>
-              </a:spcBef>
-              <a:spcAft>
-                <a:spcPts val="100"/>
-              </a:spcAft>
-            </a:pPr>
-            <a:r>
-              <a:rPr lang="fr-FR" b="1" dirty="0">
-                <a:solidFill>
-                  <a:srgbClr val="FFFFFF"/>
-                </a:solidFill>
-                <a:latin typeface="Calibri"/>
-              </a:rPr>
-              <a:t>Participants</a:t>
-            </a:r>
-          </a:p>
-          <a:p>
-            <a:pPr marL="0" indent="0" algn="l">
-              <a:buNone/>
-            </a:pPr>
-            <a:r>
-              <a:rPr lang="fr-FR" sz="1400" b="1" dirty="0">
-                <a:solidFill>
-                  <a:srgbClr val="FFFFFF"/>
-                </a:solidFill>
-                <a:latin typeface="Calibri"/>
-              </a:rPr>
-              <a:t>CAGIP</a:t>
-            </a:r>
-            <a:r>
-              <a:rPr lang="fr-FR" sz="1400" dirty="0">
-                <a:solidFill>
-                  <a:srgbClr val="DDE0EE"/>
-                </a:solidFill>
-                <a:latin typeface="Calibri"/>
-              </a:rPr>
-              <a:t> : Lead </a:t>
-            </a:r>
-            <a:r>
-              <a:rPr lang="fr-FR" sz="1400" dirty="0" err="1">
-                <a:solidFill>
-                  <a:srgbClr val="DDE0EE"/>
-                </a:solidFill>
-                <a:latin typeface="Calibri"/>
-              </a:rPr>
-              <a:t>squad</a:t>
-            </a:r>
-            <a:r>
-              <a:rPr lang="fr-FR" sz="1400" dirty="0">
-                <a:solidFill>
-                  <a:srgbClr val="DDE0EE"/>
-                </a:solidFill>
-                <a:latin typeface="Calibri"/>
-              </a:rPr>
-              <a:t> (animation)</a:t>
-            </a:r>
-          </a:p>
-          <a:p>
-            <a:pPr marL="0" indent="0" algn="l">
-              <a:buNone/>
-            </a:pPr>
-            <a:r>
-              <a:rPr lang="fr-FR" sz="1400" b="1" dirty="0">
-                <a:solidFill>
-                  <a:srgbClr val="FFFFFF"/>
-                </a:solidFill>
-                <a:latin typeface="Calibri"/>
-              </a:rPr>
-              <a:t>CAPFM Corp</a:t>
-            </a:r>
-            <a:r>
-              <a:rPr lang="fr-FR" sz="1400" dirty="0">
-                <a:solidFill>
-                  <a:srgbClr val="DDE0EE"/>
-                </a:solidFill>
-                <a:latin typeface="Calibri"/>
-              </a:rPr>
-              <a:t> : Correspondant(s) opérationnel(s)</a:t>
-            </a:r>
-          </a:p>
-        </p:txBody>
-      </p:sp>
-      <p:sp>
-        <p:nvSpPr>
-          <p:cNvPr id="7" name="Rectangle : coins arrondis 6">
+          <a:bodyPr vertOverflow="clip" horzOverflow="clip" rtlCol="0" anchor="t"/>
+          <a:lstStyle/>
+          <a:p>
+            <a:pPr algn="l"/>
+            <a:endParaRPr lang="fr-FR"/>
+          </a:p>
+        </p:txBody>
+      </p:sp>
+      <p:sp>
+        <p:nvSpPr>
+          <p:cNvPr id="7" name="Rectangle 6">
             <a:extLst>
               <a:ext uri="{FF2B5EF4-FFF2-40B4-BE49-F238E27FC236}">
-                <a16:creationId xmlns:a16="http://schemas.microsoft.com/office/drawing/2014/main" id="{9836FBF5-3212-4A17-B663-9B97E3225B28}"/>
+                <a16:creationId xmlns:a16="http://schemas.microsoft.com/office/drawing/2014/main" id="{622CDC85-544A-4C27-B47A-818B1FF380A5}"/>
               </a:ext>
             </a:extLst>
           </p:cNvPr>
@@ -17440,14 +17537,14 @@
         </p:nvSpPr>
         <p:spPr>
           <a:xfrm>
-            <a:off x="4343400" y="2209800"/>
-            <a:ext cx="3479800" cy="3073400"/>
-          </a:xfrm>
-          <a:prstGeom prst="roundRect">
+            <a:off x="609600" y="5867400"/>
+            <a:ext cx="11036300" cy="889000"/>
+          </a:xfrm>
+          <a:prstGeom prst="rect">
             <a:avLst/>
           </a:prstGeom>
           <a:solidFill>
-            <a:srgbClr val="1E2761"/>
+            <a:srgbClr val="1B2150"/>
           </a:solidFill>
           <a:ln w="12700" cap="flat" cmpd="sng" algn="ctr">
             <a:noFill/>
@@ -17472,420 +17569,32 @@
           </a:fontRef>
         </p:style>
         <p:txBody>
-          <a:bodyPr vertOverflow="clip" horzOverflow="clip" wrap="square" rtlCol="0" anchor="t" anchorCtr="0">
-            <a:noAutofit/>
-          </a:bodyPr>
-          <a:lstStyle/>
-          <a:p>
-            <a:pPr marL="0" indent="0" algn="l">
-              <a:spcAft>
-                <a:spcPts val="100"/>
-              </a:spcAft>
+          <a:bodyPr vertOverflow="clip" horzOverflow="clip" rtlCol="0" anchor="ctr" anchorCtr="0"/>
+          <a:lstStyle/>
+          <a:p>
+            <a:pPr marL="0" indent="0">
+              <a:lnSpc>
+                <a:spcPts val="1500"/>
+              </a:lnSpc>
               <a:buNone/>
             </a:pPr>
             <a:r>
-              <a:rPr lang="fr-FR" sz="1800" b="1" dirty="0">
+              <a:rPr lang="fr-FR" sz="1300" b="1" dirty="0">
+                <a:solidFill>
+                  <a:srgbClr val="F2A93B"/>
+                </a:solidFill>
+                <a:latin typeface="Calibri"/>
+              </a:rPr>
+              <a:t>À noter : </a:t>
+            </a:r>
+            <a:r>
+              <a:rPr lang="fr-FR" sz="1300" dirty="0">
                 <a:solidFill>
                   <a:srgbClr val="FFFFFF"/>
                 </a:solidFill>
                 <a:latin typeface="Calibri"/>
               </a:rPr>
-              <a:t>COPIL</a:t>
-            </a:r>
-          </a:p>
-          <a:p>
-            <a:r>
-              <a:rPr lang="fr-FR" sz="1400" i="1" dirty="0">
-                <a:solidFill>
-                  <a:schemeClr val="accent5">
-                    <a:lumMod val="60000"/>
-                    <a:lumOff val="40000"/>
-                  </a:schemeClr>
-                </a:solidFill>
-                <a:latin typeface="Calibri"/>
-              </a:rPr>
-              <a:t>Mensuel</a:t>
-            </a:r>
-          </a:p>
-          <a:p>
-            <a:pPr marL="0" indent="0" algn="l">
-              <a:spcBef>
-                <a:spcPts val="300"/>
-              </a:spcBef>
-              <a:buNone/>
-            </a:pPr>
-            <a:r>
-              <a:rPr lang="fr-FR" sz="1400" dirty="0">
-                <a:solidFill>
-                  <a:srgbClr val="DDE0EE"/>
-                </a:solidFill>
-                <a:latin typeface="Calibri"/>
-              </a:rPr>
-              <a:t>Pilotage budgétaire et des jalons, décisions d'engagement, revue des indicateurs.</a:t>
-            </a:r>
-          </a:p>
-          <a:p>
-            <a:pPr marL="0" indent="0" algn="l">
-              <a:spcBef>
-                <a:spcPts val="300"/>
-              </a:spcBef>
-              <a:buNone/>
-            </a:pPr>
-            <a:endParaRPr lang="fr-FR" sz="1400" dirty="0">
-              <a:solidFill>
-                <a:srgbClr val="DDE0EE"/>
-              </a:solidFill>
-              <a:latin typeface="Calibri"/>
-            </a:endParaRPr>
-          </a:p>
-          <a:p>
-            <a:pPr indent="0">
-              <a:spcBef>
-                <a:spcPts val="300"/>
-              </a:spcBef>
-              <a:spcAft>
-                <a:spcPts val="100"/>
-              </a:spcAft>
-              <a:buNone/>
-            </a:pPr>
-            <a:r>
-              <a:rPr lang="fr-FR" b="1" dirty="0">
-                <a:solidFill>
-                  <a:srgbClr val="FFFFFF"/>
-                </a:solidFill>
-                <a:latin typeface="Calibri"/>
-              </a:rPr>
-              <a:t>Participants</a:t>
-            </a:r>
-          </a:p>
-          <a:p>
-            <a:r>
-              <a:rPr lang="fr-FR" sz="1400" b="1" dirty="0">
-                <a:solidFill>
-                  <a:srgbClr val="FFFFFF"/>
-                </a:solidFill>
-                <a:latin typeface="Calibri"/>
-              </a:rPr>
-              <a:t>CAGIP</a:t>
-            </a:r>
-            <a:r>
-              <a:rPr lang="fr-FR" sz="1400" dirty="0">
-                <a:solidFill>
-                  <a:srgbClr val="DDE0EE"/>
-                </a:solidFill>
-                <a:latin typeface="Calibri"/>
-              </a:rPr>
-              <a:t> : Lead SQUAD</a:t>
-            </a:r>
-            <a:r>
-              <a:rPr lang="fr-FR" sz="1400" dirty="0">
-                <a:solidFill>
-                  <a:srgbClr val="DDE0EE"/>
-                </a:solidFill>
-              </a:rPr>
-              <a:t> (animation)</a:t>
-            </a:r>
-          </a:p>
-          <a:p>
-            <a:pPr marL="0" indent="0" algn="l">
-              <a:buNone/>
-            </a:pPr>
-            <a:r>
-              <a:rPr lang="fr-FR" sz="1400" dirty="0">
-                <a:solidFill>
-                  <a:srgbClr val="DDE0EE"/>
-                </a:solidFill>
-                <a:latin typeface="Calibri"/>
-              </a:rPr>
-              <a:t>, Manager CAGIP et Lead DE (gestion des engagements)</a:t>
-            </a:r>
-          </a:p>
-          <a:p>
-            <a:pPr marL="0" indent="0" algn="l">
-              <a:buNone/>
-            </a:pPr>
-            <a:r>
-              <a:rPr lang="fr-FR" sz="1400" b="1" dirty="0">
-                <a:solidFill>
-                  <a:srgbClr val="FFFFFF"/>
-                </a:solidFill>
-                <a:latin typeface="Calibri"/>
-              </a:rPr>
-              <a:t>CAPFM Corp</a:t>
-            </a:r>
-            <a:r>
-              <a:rPr lang="fr-FR" sz="1400" dirty="0">
-                <a:solidFill>
-                  <a:srgbClr val="DDE0EE"/>
-                </a:solidFill>
-                <a:latin typeface="Calibri"/>
-              </a:rPr>
-              <a:t> : Correspondant(s) Pilotage &amp; stratégie</a:t>
-            </a:r>
-          </a:p>
-        </p:txBody>
-      </p:sp>
-      <p:sp>
-        <p:nvSpPr>
-          <p:cNvPr id="8" name="Rectangle : coins arrondis 7">
-            <a:extLst>
-              <a:ext uri="{FF2B5EF4-FFF2-40B4-BE49-F238E27FC236}">
-                <a16:creationId xmlns:a16="http://schemas.microsoft.com/office/drawing/2014/main" id="{661373E9-1936-4B2D-949D-64F88F12D17B}"/>
-              </a:ext>
-            </a:extLst>
-          </p:cNvPr>
-          <p:cNvSpPr/>
-          <p:nvPr/>
-        </p:nvSpPr>
-        <p:spPr>
-          <a:xfrm>
-            <a:off x="8140700" y="2209800"/>
-            <a:ext cx="3479800" cy="3073400"/>
-          </a:xfrm>
-          <a:prstGeom prst="roundRect">
-            <a:avLst/>
-          </a:prstGeom>
-          <a:solidFill>
-            <a:srgbClr val="1E2761"/>
-          </a:solidFill>
-          <a:ln w="12700" cap="flat" cmpd="sng" algn="ctr">
-            <a:noFill/>
-            <a:prstDash val="solid"/>
-            <a:miter lim="800000"/>
-          </a:ln>
-        </p:spPr>
-        <p:style>
-          <a:lnRef idx="2">
-            <a:schemeClr val="accent1">
-              <a:shade val="15000"/>
-            </a:schemeClr>
-          </a:lnRef>
-          <a:fillRef idx="1">
-            <a:schemeClr val="accent1"/>
-          </a:fillRef>
-          <a:effectRef idx="0">
-            <a:schemeClr val="accent1"/>
-          </a:effectRef>
-          <a:fontRef idx="minor">
-            <a:schemeClr val="lt1"/>
-          </a:fontRef>
-        </p:style>
-        <p:txBody>
-          <a:bodyPr vertOverflow="clip" horzOverflow="clip" wrap="square" rtlCol="0" anchor="t" anchorCtr="0">
-            <a:noAutofit/>
-          </a:bodyPr>
-          <a:lstStyle/>
-          <a:p>
-            <a:pPr marL="0" indent="0" algn="l">
-              <a:spcAft>
-                <a:spcPts val="100"/>
-              </a:spcAft>
-              <a:buNone/>
-            </a:pPr>
-            <a:r>
-              <a:rPr lang="fr-FR" sz="1800" b="1" dirty="0">
-                <a:solidFill>
-                  <a:srgbClr val="FFFFFF"/>
-                </a:solidFill>
-                <a:latin typeface="Calibri"/>
-              </a:rPr>
-              <a:t>Daily</a:t>
-            </a:r>
-          </a:p>
-          <a:p>
-            <a:pPr indent="0">
-              <a:buNone/>
-            </a:pPr>
-            <a:r>
-              <a:rPr lang="fr-FR" sz="1400" i="1" dirty="0">
-                <a:solidFill>
-                  <a:schemeClr val="accent5">
-                    <a:lumMod val="60000"/>
-                    <a:lumOff val="40000"/>
-                  </a:schemeClr>
-                </a:solidFill>
-                <a:latin typeface="Calibri"/>
-              </a:rPr>
-              <a:t>Quotidien</a:t>
-            </a:r>
-          </a:p>
-          <a:p>
-            <a:pPr marL="0" indent="0" algn="l">
-              <a:spcBef>
-                <a:spcPts val="300"/>
-              </a:spcBef>
-              <a:buNone/>
-            </a:pPr>
-            <a:r>
-              <a:rPr lang="fr-FR" sz="1400" dirty="0">
-                <a:solidFill>
-                  <a:srgbClr val="DDE0EE"/>
-                </a:solidFill>
-                <a:latin typeface="Calibri"/>
-              </a:rPr>
-              <a:t>Point d'équipe interne court : avancement, blocages et coordination du jour.</a:t>
-            </a:r>
-          </a:p>
-          <a:p>
-            <a:pPr marL="0" indent="0" algn="l">
-              <a:spcBef>
-                <a:spcPts val="300"/>
-              </a:spcBef>
-              <a:buNone/>
-            </a:pPr>
-            <a:endParaRPr lang="fr-FR" sz="1400" b="1" dirty="0">
-              <a:solidFill>
-                <a:srgbClr val="C3C7E0"/>
-              </a:solidFill>
-              <a:latin typeface="Calibri"/>
-            </a:endParaRPr>
-          </a:p>
-          <a:p>
-            <a:pPr>
-              <a:spcBef>
-                <a:spcPts val="300"/>
-              </a:spcBef>
-              <a:spcAft>
-                <a:spcPts val="100"/>
-              </a:spcAft>
-            </a:pPr>
-            <a:r>
-              <a:rPr lang="fr-FR" b="1" dirty="0">
-                <a:solidFill>
-                  <a:srgbClr val="FFFFFF"/>
-                </a:solidFill>
-                <a:latin typeface="Calibri"/>
-              </a:rPr>
-              <a:t>Participants</a:t>
-            </a:r>
-          </a:p>
-          <a:p>
-            <a:pPr marL="0" indent="0" algn="l">
-              <a:buNone/>
-            </a:pPr>
-            <a:r>
-              <a:rPr lang="fr-FR" sz="1400" b="1" dirty="0">
-                <a:solidFill>
-                  <a:srgbClr val="FFFFFF"/>
-                </a:solidFill>
-                <a:latin typeface="Calibri"/>
-              </a:rPr>
-              <a:t>CAGIP</a:t>
-            </a:r>
-            <a:r>
-              <a:rPr lang="fr-FR" sz="1400" dirty="0">
-                <a:solidFill>
-                  <a:srgbClr val="DDE0EE"/>
-                </a:solidFill>
-                <a:latin typeface="Calibri"/>
-              </a:rPr>
-              <a:t> : Lead squad &amp; Cloud Ops</a:t>
-            </a:r>
-          </a:p>
-        </p:txBody>
-      </p:sp>
-      <p:sp>
-        <p:nvSpPr>
-          <p:cNvPr id="9" name="Rectangle : coins arrondis 8">
-            <a:extLst>
-              <a:ext uri="{FF2B5EF4-FFF2-40B4-BE49-F238E27FC236}">
-                <a16:creationId xmlns:a16="http://schemas.microsoft.com/office/drawing/2014/main" id="{5496B810-0254-4647-91CB-B195695B294C}"/>
-              </a:ext>
-            </a:extLst>
-          </p:cNvPr>
-          <p:cNvSpPr/>
-          <p:nvPr/>
-        </p:nvSpPr>
-        <p:spPr>
-          <a:xfrm>
-            <a:off x="546100" y="5715000"/>
-            <a:ext cx="11099800" cy="736600"/>
-          </a:xfrm>
-          <a:prstGeom prst="roundRect">
-            <a:avLst/>
-          </a:prstGeom>
-          <a:solidFill>
-            <a:srgbClr val="EAECF4"/>
-          </a:solidFill>
-          <a:ln w="12700" cap="flat" cmpd="sng" algn="ctr">
-            <a:noFill/>
-            <a:prstDash val="solid"/>
-            <a:miter lim="800000"/>
-          </a:ln>
-        </p:spPr>
-        <p:style>
-          <a:lnRef idx="2">
-            <a:schemeClr val="accent1">
-              <a:shade val="15000"/>
-            </a:schemeClr>
-          </a:lnRef>
-          <a:fillRef idx="1">
-            <a:schemeClr val="accent1"/>
-          </a:fillRef>
-          <a:effectRef idx="0">
-            <a:schemeClr val="accent1"/>
-          </a:effectRef>
-          <a:fontRef idx="minor">
-            <a:schemeClr val="lt1"/>
-          </a:fontRef>
-        </p:style>
-        <p:txBody>
-          <a:bodyPr vertOverflow="clip" horzOverflow="clip" wrap="square" rtlCol="0" anchor="ctr" anchorCtr="0">
-            <a:noAutofit/>
-          </a:bodyPr>
-          <a:lstStyle/>
-          <a:p>
-            <a:pPr marL="200025" indent="-200025">
-              <a:spcAft>
-                <a:spcPts val="400"/>
-              </a:spcAft>
-              <a:buFont typeface="Arial"/>
-              <a:buChar char="•"/>
-            </a:pPr>
-            <a:r>
-              <a:rPr lang="fr-FR" sz="1500" dirty="0">
-                <a:solidFill>
-                  <a:srgbClr val="1E2761"/>
-                </a:solidFill>
-                <a:latin typeface="Calibri"/>
-              </a:rPr>
-              <a:t>Enveloppe capacitaire globalisée build &amp; run.</a:t>
-            </a:r>
-          </a:p>
-          <a:p>
-            <a:pPr marL="200025" indent="-200025">
-              <a:spcAft>
-                <a:spcPts val="400"/>
-              </a:spcAft>
-              <a:buFont typeface="Arial"/>
-              <a:buChar char="•"/>
-            </a:pPr>
-            <a:r>
-              <a:rPr lang="fr-FR" sz="1500" dirty="0">
-                <a:solidFill>
-                  <a:srgbClr val="1E2761"/>
-                </a:solidFill>
-                <a:latin typeface="Calibri"/>
-              </a:rPr>
-              <a:t>Suivi des imputations et des sujets run &amp; </a:t>
-            </a:r>
-            <a:r>
-              <a:rPr lang="fr-FR" sz="1500" dirty="0" err="1">
-                <a:solidFill>
-                  <a:srgbClr val="1E2761"/>
-                </a:solidFill>
-                <a:latin typeface="Calibri"/>
-              </a:rPr>
-              <a:t>build</a:t>
-            </a:r>
-            <a:r>
-              <a:rPr lang="fr-FR" sz="1500" dirty="0">
-                <a:solidFill>
-                  <a:srgbClr val="1E2761"/>
-                </a:solidFill>
-                <a:latin typeface="Calibri"/>
-              </a:rPr>
-              <a:t> en COTECH— point hebdomadaire avec l'entité</a:t>
+              <a:t>les projets métier seront menés selon les processus d'infogérance traditionnels, sauf les contributions d'expertise qui seront menées de manière capacitaire. La capacité technique pourra être ajustée à la hausse ou à la baisse, selon un délai qui reste à préciser.</a:t>
             </a:r>
           </a:p>
         </p:txBody>
@@ -17893,7 +17602,7 @@
     </p:spTree>
     <p:extLst>
       <p:ext uri="{BB962C8B-B14F-4D97-AF65-F5344CB8AC3E}">
-        <p14:creationId xmlns:p14="http://schemas.microsoft.com/office/powerpoint/2010/main" val="1579526359"/>
+        <p14:creationId xmlns:p14="http://schemas.microsoft.com/office/powerpoint/2010/main" val="999650551"/>
       </p:ext>
     </p:extLst>
   </p:cSld>
@@ -18495,7 +18204,7 @@
 
 <file path=ppt/webextensions/taskpanes.xml><?xml version="1.0" encoding="utf-8"?>
 <wetp:taskpanes xmlns:wetp="http://schemas.microsoft.com/office/webextensions/taskpanes/2010/11">
-  <wetp:taskpane dockstate="right" visibility="0" width="350" row="1">
+  <wetp:taskpane dockstate="right" visibility="0" width="350" row="0">
     <wetp:webextensionref xmlns:r="http://schemas.openxmlformats.org/officeDocument/2006/relationships" r:id="rId1"/>
   </wetp:taskpane>
 </wetp:taskpanes>
@@ -18763,15 +18472,6 @@
 </file>
 
 <file path=customXml/item2.xml><?xml version="1.0" encoding="utf-8"?>
-<?mso-contentType ?>
-<FormTemplates xmlns="http://schemas.microsoft.com/sharepoint/v3/contenttype/forms">
-  <Display>DocumentLibraryForm</Display>
-  <Edit>DocumentLibraryForm</Edit>
-  <New>DocumentLibraryForm</New>
-</FormTemplates>
-</file>
-
-<file path=customXml/item3.xml><?xml version="1.0" encoding="utf-8"?>
 <p:properties xmlns:p="http://schemas.microsoft.com/office/2006/metadata/properties" xmlns:xsi="http://www.w3.org/2001/XMLSchema-instance" xmlns:pc="http://schemas.microsoft.com/office/infopath/2007/PartnerControls">
   <documentManagement>
     <TaxCatchAll xmlns="fdaed77b-87a6-445a-b9ad-b849e8c57051" xsi:nil="true"/>
@@ -18781,6 +18481,15 @@
     <_Flow_SignoffStatus xmlns="c7267b83-c4d7-4ce9-a1b0-994575924ad9" xsi:nil="true"/>
   </documentManagement>
 </p:properties>
+</file>
+
+<file path=customXml/item3.xml><?xml version="1.0" encoding="utf-8"?>
+<?mso-contentType ?>
+<FormTemplates xmlns="http://schemas.microsoft.com/sharepoint/v3/contenttype/forms">
+  <Display>DocumentLibraryForm</Display>
+  <Edit>DocumentLibraryForm</Edit>
+  <New>DocumentLibraryForm</New>
+</FormTemplates>
 </file>
 
 <file path=customXml/itemProps1.xml><?xml version="1.0" encoding="utf-8"?>
@@ -18803,14 +18512,6 @@
 </file>
 
 <file path=customXml/itemProps2.xml><?xml version="1.0" encoding="utf-8"?>
-<ds:datastoreItem xmlns:ds="http://schemas.openxmlformats.org/officeDocument/2006/customXml" ds:itemID="{292DF0ED-294E-42F1-B6A8-3711B65ACA8C}">
-  <ds:schemaRefs>
-    <ds:schemaRef ds:uri="http://schemas.microsoft.com/sharepoint/v3/contenttype/forms"/>
-  </ds:schemaRefs>
-</ds:datastoreItem>
-</file>
-
-<file path=customXml/itemProps3.xml><?xml version="1.0" encoding="utf-8"?>
 <ds:datastoreItem xmlns:ds="http://schemas.openxmlformats.org/officeDocument/2006/customXml" ds:itemID="{D47F55C5-560E-44B0-9DD1-9CE2B36314A4}">
   <ds:schemaRefs>
     <ds:schemaRef ds:uri="http://purl.org/dc/dcmitype/"/>
@@ -18825,4 +18526,12 @@
     <ds:schemaRef ds:uri="c7267b83-c4d7-4ce9-a1b0-994575924ad9"/>
   </ds:schemaRefs>
 </ds:datastoreItem>
+</file>
+
+<file path=customXml/itemProps3.xml><?xml version="1.0" encoding="utf-8"?>
+<ds:datastoreItem xmlns:ds="http://schemas.openxmlformats.org/officeDocument/2006/customXml" ds:itemID="{292DF0ED-294E-42F1-B6A8-3711B65ACA8C}">
+  <ds:schemaRefs>
+    <ds:schemaRef ds:uri="http://schemas.microsoft.com/sharepoint/v3/contenttype/forms"/>
+  </ds:schemaRefs>
+</ds:datastoreItem>
 </file>